--- a/Y9_Exploring_Science/9B_Plant_growth/9B_L05_Growing_crops.pptx
+++ b/Y9_Exploring_Science/9B_Plant_growth/9B_L05_Growing_crops.pptx
@@ -132,7 +132,7 @@
           <a:lstStyle/>
           <a:p>
             <a:pPr>
-              <a:defRPr sz="1400" b="0" i="0" u="none" strike="noStrike">
+              <a:defRPr sz="1600" b="0" i="0" u="none" strike="noStrike">
                 <a:solidFill>
                   <a:srgbClr val="0F2A5F"/>
                 </a:solidFill>
@@ -140,7 +140,7 @@
               </a:defRPr>
             </a:pPr>
             <a:r>
-              <a:rPr sz="1400" b="0" i="0" u="none" strike="noStrike">
+              <a:rPr sz="1600" b="0" i="0" u="none" strike="noStrike">
                 <a:solidFill>
                   <a:srgbClr val="0F2A5F"/>
                 </a:solidFill>
@@ -189,7 +189,7 @@
               <a:lstStyle/>
               <a:p>
                 <a:pPr>
-                  <a:defRPr b="0" i="0" strike="noStrike" sz="1000" u="none">
+                  <a:defRPr b="0" i="0" strike="noStrike" sz="1200" u="none">
                     <a:solidFill>
                       <a:srgbClr val="141B26"/>
                     </a:solidFill>
@@ -257,7 +257,7 @@
             <a:lstStyle/>
             <a:p>
               <a:pPr>
-                <a:defRPr b="0" i="0" strike="noStrike" sz="1000" u="none">
+                <a:defRPr b="0" i="0" strike="noStrike" sz="1200" u="none">
                   <a:solidFill>
                     <a:srgbClr val="141B26"/>
                   </a:solidFill>
@@ -294,7 +294,7 @@
               <a:lstStyle/>
               <a:p>
                 <a:pPr>
-                  <a:defRPr sz="1100" b="0" i="0" u="none" strike="noStrike">
+                  <a:defRPr sz="1300" b="0" i="0" u="none" strike="noStrike">
                     <a:solidFill>
                       <a:srgbClr val="141B26"/>
                     </a:solidFill>
@@ -302,7 +302,7 @@
                   </a:defRPr>
                 </a:pPr>
                 <a:r>
-                  <a:rPr sz="1100" b="0" i="0" u="none" strike="noStrike">
+                  <a:rPr sz="1300" b="0" i="0" u="none" strike="noStrike">
                     <a:solidFill>
                       <a:srgbClr val="141B26"/>
                     </a:solidFill>
@@ -334,7 +334,7 @@
           <a:lstStyle/>
           <a:p>
             <a:pPr>
-              <a:defRPr sz="1100" b="0" i="0" u="none" strike="noStrike">
+              <a:defRPr sz="1300" b="0" i="0" u="none" strike="noStrike">
                 <a:solidFill>
                   <a:srgbClr val="141B26"/>
                 </a:solidFill>
@@ -375,7 +375,7 @@
               <a:lstStyle/>
               <a:p>
                 <a:pPr>
-                  <a:defRPr sz="1100" b="0" i="0" u="none" strike="noStrike">
+                  <a:defRPr sz="1300" b="0" i="0" u="none" strike="noStrike">
                     <a:solidFill>
                       <a:srgbClr val="141B26"/>
                     </a:solidFill>
@@ -383,7 +383,7 @@
                   </a:defRPr>
                 </a:pPr>
                 <a:r>
-                  <a:rPr sz="1100" b="0" i="0" u="none" strike="noStrike">
+                  <a:rPr sz="1300" b="0" i="0" u="none" strike="noStrike">
                     <a:solidFill>
                       <a:srgbClr val="141B26"/>
                     </a:solidFill>
@@ -415,7 +415,7 @@
           <a:lstStyle/>
           <a:p>
             <a:pPr>
-              <a:defRPr sz="1100" b="0" i="0" u="none" strike="noStrike">
+              <a:defRPr sz="1300" b="0" i="0" u="none" strike="noStrike">
                 <a:solidFill>
                   <a:srgbClr val="141B26"/>
                 </a:solidFill>
@@ -2162,7 +2162,7 @@
         <p:spPr>
           <a:xfrm>
             <a:off x="548640" y="3657600"/>
-            <a:ext cx="10515600" cy="914400"/>
+            <a:ext cx="10515600" cy="1097280"/>
           </a:xfrm>
           <a:prstGeom prst="rect">
             <a:avLst/>
@@ -2175,7 +2175,7 @@
           <a:lstStyle>
             <a:lvl1pPr indent="0" marL="0">
               <a:buNone/>
-              <a:defRPr lang="en-US" sz="2000" dirty="0">
+              <a:defRPr lang="en-US" sz="2400" dirty="0">
                 <a:solidFill>
                   <a:srgbClr val="FFFFFF"/>
                 </a:solidFill>
@@ -2186,7 +2186,7 @@
             <a:pPr indent="0" marL="0">
               <a:buNone/>
             </a:pPr>
-            <a:endParaRPr lang="en-US" sz="2000" dirty="0"/>
+            <a:endParaRPr lang="en-US" sz="2400" dirty="0"/>
           </a:p>
         </p:txBody>
       </p:sp>
@@ -2286,14 +2286,14 @@
               <a:buNone/>
             </a:pPr>
             <a:r>
-              <a:rPr lang="en-US" sz="900" dirty="0">
+              <a:rPr lang="en-US" sz="1000" dirty="0">
                 <a:solidFill>
                   <a:srgbClr val="5B6574"/>
                 </a:solidFill>
               </a:rPr>
               <a:t>Year 9 Science  |  9B Plant growth  |  Lesson 5: Growing crops</a:t>
             </a:r>
-            <a:endParaRPr lang="en-US" sz="900" dirty="0"/>
+            <a:endParaRPr lang="en-US" sz="1000" dirty="0"/>
           </a:p>
         </p:txBody>
       </p:sp>
@@ -2462,14 +2462,14 @@
               <a:buNone/>
             </a:pPr>
             <a:r>
-              <a:rPr lang="en-US" sz="900" dirty="0">
+              <a:rPr lang="en-US" sz="1000" dirty="0">
                 <a:solidFill>
                   <a:srgbClr val="5B6574"/>
                 </a:solidFill>
               </a:rPr>
               <a:t>Year 9 Science  |  9B Plant growth  |  Lesson 5: Growing crops</a:t>
             </a:r>
-            <a:endParaRPr lang="en-US" sz="900" dirty="0"/>
+            <a:endParaRPr lang="en-US" sz="1000" dirty="0"/>
           </a:p>
         </p:txBody>
       </p:sp>
@@ -2638,14 +2638,14 @@
               <a:buNone/>
             </a:pPr>
             <a:r>
-              <a:rPr lang="en-US" sz="900" dirty="0">
+              <a:rPr lang="en-US" sz="1000" dirty="0">
                 <a:solidFill>
                   <a:srgbClr val="5B6574"/>
                 </a:solidFill>
               </a:rPr>
               <a:t>Year 9 Science  |  9B Plant growth  |  Lesson 5: Growing crops</a:t>
             </a:r>
-            <a:endParaRPr lang="en-US" sz="900" dirty="0"/>
+            <a:endParaRPr lang="en-US" sz="1000" dirty="0"/>
           </a:p>
         </p:txBody>
       </p:sp>
@@ -2774,7 +2774,7 @@
           <a:lstStyle>
             <a:lvl1pPr indent="0" marL="0">
               <a:buNone/>
-              <a:defRPr lang="en-US" sz="3000" b="1" dirty="0">
+              <a:defRPr lang="en-US" sz="3400" b="1" dirty="0">
                 <a:solidFill>
                   <a:srgbClr val="3A2E00"/>
                 </a:solidFill>
@@ -2785,7 +2785,7 @@
             <a:pPr indent="0" marL="0">
               <a:buNone/>
             </a:pPr>
-            <a:endParaRPr lang="en-US" sz="3000" dirty="0"/>
+            <a:endParaRPr lang="en-US" sz="3400" dirty="0"/>
           </a:p>
         </p:txBody>
       </p:sp>
@@ -3202,14 +3202,14 @@
               <a:buNone/>
             </a:pPr>
             <a:r>
-              <a:rPr lang="en-US" sz="1300" b="1" spc="200" kern="0" dirty="0">
+              <a:rPr lang="en-US" sz="1400" b="1" spc="200" kern="0" dirty="0">
                 <a:solidFill>
                   <a:srgbClr val="F2CE3E"/>
                 </a:solidFill>
               </a:rPr>
               <a:t>YEAR 9 SCIENCE  ·  9B PLANT GROWTH  ·  LESSON 5 OF 7</a:t>
             </a:r>
-            <a:endParaRPr lang="en-US" sz="1300" dirty="0"/>
+            <a:endParaRPr lang="en-US" sz="1400" dirty="0"/>
           </a:p>
         </p:txBody>
       </p:sp>
@@ -3262,7 +3262,7 @@
         <p:spPr>
           <a:xfrm>
             <a:off x="548640" y="3657600"/>
-            <a:ext cx="10515600" cy="914400"/>
+            <a:ext cx="10515600" cy="1097280"/>
           </a:xfrm>
           <a:prstGeom prst="rect">
             <a:avLst/>
@@ -3278,14 +3278,14 @@
               <a:buNone/>
             </a:pPr>
             <a:r>
-              <a:rPr lang="en-US" sz="2000" dirty="0">
+              <a:rPr lang="en-US" sz="2400" dirty="0">
                 <a:solidFill>
                   <a:srgbClr val="FFFFFF"/>
                 </a:solidFill>
               </a:rPr>
               <a:t>How do farmers get the biggest harvest from the same field?</a:t>
             </a:r>
-            <a:endParaRPr lang="en-US" sz="2000" dirty="0"/>
+            <a:endParaRPr lang="en-US" sz="2400" dirty="0"/>
           </a:p>
         </p:txBody>
       </p:sp>
@@ -3314,14 +3314,14 @@
               <a:buNone/>
             </a:pPr>
             <a:r>
-              <a:rPr lang="en-US" sz="1200" dirty="0">
+              <a:rPr lang="en-US" sz="1400" dirty="0">
                 <a:solidFill>
                   <a:srgbClr val="C9D3E6"/>
                 </a:solidFill>
               </a:rPr>
               <a:t>Exploring Science International 9  ·  Student Book pages 28 to 31  ·  Workbook pages 20 to 22</a:t>
             </a:r>
-            <a:endParaRPr lang="en-US" sz="1200" dirty="0"/>
+            <a:endParaRPr lang="en-US" sz="1400" dirty="0"/>
           </a:p>
         </p:txBody>
       </p:sp>
@@ -3500,14 +3500,14 @@
               <a:buNone/>
             </a:pPr>
             <a:r>
-              <a:rPr lang="en-US" sz="1400" i="1" dirty="0">
+              <a:rPr lang="en-US" sz="1600" i="1" dirty="0">
                 <a:solidFill>
                   <a:srgbClr val="5B6574"/>
                 </a:solidFill>
               </a:rPr>
               <a:t>Mini whiteboards. One answer each, then we check.</a:t>
             </a:r>
-            <a:endParaRPr lang="en-US" sz="1400" dirty="0"/>
+            <a:endParaRPr lang="en-US" sz="1600" dirty="0"/>
           </a:p>
         </p:txBody>
       </p:sp>
@@ -3556,16 +3556,14 @@
           <a:ln/>
         </p:spPr>
         <p:txBody>
-          <a:bodyPr wrap="square" lIns="0" tIns="0" rIns="0" bIns="0" rtlCol="0" anchor="ctr">
-            <a:normAutofit/>
-          </a:bodyPr>
+          <a:bodyPr wrap="square" lIns="0" tIns="0" rIns="0" bIns="0" rtlCol="0" anchor="ctr"/>
           <a:lstStyle/>
           <a:p>
             <a:pPr indent="0" marL="0">
               <a:buNone/>
             </a:pPr>
             <a:r>
-              <a:rPr lang="en-US" sz="1600" b="1" dirty="0">
+              <a:rPr lang="en-US" sz="2000" b="1" dirty="0">
                 <a:solidFill>
                   <a:srgbClr val="7B3A8E"/>
                 </a:solidFill>
@@ -3576,14 +3574,14 @@
               <a:buNone/>
             </a:pPr>
             <a:r>
-              <a:rPr lang="en-US" sz="1600" dirty="0">
+              <a:rPr lang="en-US" sz="2000" dirty="0">
                 <a:solidFill>
                   <a:srgbClr val="141B26"/>
                 </a:solidFill>
               </a:rPr>
               <a:t>Which type of pesticide kills weeds?</a:t>
             </a:r>
-            <a:endParaRPr lang="en-US" sz="1600" dirty="0"/>
+            <a:endParaRPr lang="en-US" sz="2000" dirty="0"/>
           </a:p>
         </p:txBody>
       </p:sp>
@@ -3632,16 +3630,14 @@
           <a:ln/>
         </p:spPr>
         <p:txBody>
-          <a:bodyPr wrap="square" lIns="0" tIns="0" rIns="0" bIns="0" rtlCol="0" anchor="ctr">
-            <a:normAutofit/>
-          </a:bodyPr>
+          <a:bodyPr wrap="square" lIns="0" tIns="0" rIns="0" bIns="0" rtlCol="0" anchor="ctr"/>
           <a:lstStyle/>
           <a:p>
             <a:pPr indent="0" marL="0">
               <a:buNone/>
             </a:pPr>
             <a:r>
-              <a:rPr lang="en-US" sz="1600" b="1" dirty="0">
+              <a:rPr lang="en-US" sz="2000" b="1" dirty="0">
                 <a:solidFill>
                   <a:srgbClr val="7B3A8E"/>
                 </a:solidFill>
@@ -3652,14 +3648,14 @@
               <a:buNone/>
             </a:pPr>
             <a:r>
-              <a:rPr lang="en-US" sz="1600" dirty="0">
+              <a:rPr lang="en-US" sz="2000" dirty="0">
                 <a:solidFill>
                   <a:srgbClr val="141B26"/>
                 </a:solidFill>
               </a:rPr>
               <a:t>Name two mineral salts found in fertilisers.</a:t>
             </a:r>
-            <a:endParaRPr lang="en-US" sz="1600" dirty="0"/>
+            <a:endParaRPr lang="en-US" sz="2000" dirty="0"/>
           </a:p>
         </p:txBody>
       </p:sp>
@@ -3708,16 +3704,14 @@
           <a:ln/>
         </p:spPr>
         <p:txBody>
-          <a:bodyPr wrap="square" lIns="0" tIns="0" rIns="0" bIns="0" rtlCol="0" anchor="ctr">
-            <a:normAutofit/>
-          </a:bodyPr>
+          <a:bodyPr wrap="square" lIns="0" tIns="0" rIns="0" bIns="0" rtlCol="0" anchor="ctr"/>
           <a:lstStyle/>
           <a:p>
             <a:pPr indent="0" marL="0">
               <a:buNone/>
             </a:pPr>
             <a:r>
-              <a:rPr lang="en-US" sz="1600" b="1" dirty="0">
+              <a:rPr lang="en-US" sz="2000" b="1" dirty="0">
                 <a:solidFill>
                   <a:srgbClr val="7B3A8E"/>
                 </a:solidFill>
@@ -3728,14 +3722,14 @@
               <a:buNone/>
             </a:pPr>
             <a:r>
-              <a:rPr lang="en-US" sz="1600" dirty="0">
+              <a:rPr lang="en-US" sz="2000" dirty="0">
                 <a:solidFill>
                   <a:srgbClr val="141B26"/>
                 </a:solidFill>
               </a:rPr>
               <a:t>Which fertiliser works more slowly, manure or artificial fertiliser? Why?</a:t>
             </a:r>
-            <a:endParaRPr lang="en-US" sz="1600" dirty="0"/>
+            <a:endParaRPr lang="en-US" sz="2000" dirty="0"/>
           </a:p>
         </p:txBody>
       </p:sp>
@@ -3784,16 +3778,14 @@
           <a:ln/>
         </p:spPr>
         <p:txBody>
-          <a:bodyPr wrap="square" lIns="0" tIns="0" rIns="0" bIns="0" rtlCol="0" anchor="ctr">
-            <a:normAutofit/>
-          </a:bodyPr>
+          <a:bodyPr wrap="square" lIns="0" tIns="0" rIns="0" bIns="0" rtlCol="0" anchor="ctr"/>
           <a:lstStyle/>
           <a:p>
             <a:pPr indent="0" marL="0">
               <a:buNone/>
             </a:pPr>
             <a:r>
-              <a:rPr lang="en-US" sz="1600" b="1" dirty="0">
+              <a:rPr lang="en-US" sz="2000" b="1" dirty="0">
                 <a:solidFill>
                   <a:srgbClr val="7B3A8E"/>
                 </a:solidFill>
@@ -3804,14 +3796,14 @@
               <a:buNone/>
             </a:pPr>
             <a:r>
-              <a:rPr lang="en-US" sz="1600" dirty="0">
+              <a:rPr lang="en-US" sz="2000" dirty="0">
                 <a:solidFill>
                   <a:srgbClr val="141B26"/>
                 </a:solidFill>
               </a:rPr>
               <a:t>In the bean investigation, which number of drops gave the most growth?</a:t>
             </a:r>
-            <a:endParaRPr lang="en-US" sz="1600" dirty="0"/>
+            <a:endParaRPr lang="en-US" sz="2000" dirty="0"/>
           </a:p>
         </p:txBody>
       </p:sp>
@@ -3860,16 +3852,14 @@
           <a:ln/>
         </p:spPr>
         <p:txBody>
-          <a:bodyPr wrap="square" lIns="0" tIns="0" rIns="0" bIns="0" rtlCol="0" anchor="ctr">
-            <a:normAutofit/>
-          </a:bodyPr>
+          <a:bodyPr wrap="square" lIns="0" tIns="0" rIns="0" bIns="0" rtlCol="0" anchor="ctr"/>
           <a:lstStyle/>
           <a:p>
             <a:pPr indent="0" marL="0">
               <a:buNone/>
             </a:pPr>
             <a:r>
-              <a:rPr lang="en-US" sz="1600" b="1" dirty="0">
+              <a:rPr lang="en-US" sz="2000" b="1" dirty="0">
                 <a:solidFill>
                   <a:srgbClr val="7B3A8E"/>
                 </a:solidFill>
@@ -3880,14 +3870,14 @@
               <a:buNone/>
             </a:pPr>
             <a:r>
-              <a:rPr lang="en-US" sz="1600" dirty="0">
+              <a:rPr lang="en-US" sz="2000" dirty="0">
                 <a:solidFill>
                   <a:srgbClr val="141B26"/>
                 </a:solidFill>
               </a:rPr>
               <a:t>What is a variety?</a:t>
             </a:r>
-            <a:endParaRPr lang="en-US" sz="1600" dirty="0"/>
+            <a:endParaRPr lang="en-US" sz="2000" dirty="0"/>
           </a:p>
         </p:txBody>
       </p:sp>
@@ -4216,23 +4206,21 @@
           <a:ln/>
         </p:spPr>
         <p:txBody>
-          <a:bodyPr wrap="square" lIns="0" tIns="0" rIns="0" bIns="0" rtlCol="0" anchor="t">
-            <a:normAutofit/>
-          </a:bodyPr>
+          <a:bodyPr wrap="square" lIns="0" tIns="0" rIns="0" bIns="0" rtlCol="0" anchor="t"/>
           <a:lstStyle/>
           <a:p>
             <a:pPr indent="0" marL="0">
               <a:buNone/>
             </a:pPr>
             <a:r>
-              <a:rPr lang="en-US" sz="1700" dirty="0">
+              <a:rPr lang="en-US" sz="2000" dirty="0">
                 <a:solidFill>
                   <a:srgbClr val="141B26"/>
                 </a:solidFill>
               </a:rPr>
               <a:t>Core: match the pesticides, plot the bean plant results on the grid and describe the trend, then fill the gaps on fertilisers.</a:t>
             </a:r>
-            <a:endParaRPr lang="en-US" sz="1700" dirty="0"/>
+            <a:endParaRPr lang="en-US" sz="2000" dirty="0"/>
           </a:p>
         </p:txBody>
       </p:sp>
@@ -4315,23 +4303,21 @@
           <a:ln/>
         </p:spPr>
         <p:txBody>
-          <a:bodyPr wrap="square" lIns="0" tIns="0" rIns="0" bIns="0" rtlCol="0" anchor="t">
-            <a:normAutofit/>
-          </a:bodyPr>
+          <a:bodyPr wrap="square" lIns="0" tIns="0" rIns="0" bIns="0" rtlCol="0" anchor="t"/>
           <a:lstStyle/>
           <a:p>
             <a:pPr indent="0" marL="0">
               <a:buNone/>
             </a:pPr>
             <a:r>
-              <a:rPr lang="en-US" sz="1700" dirty="0">
+              <a:rPr lang="en-US" sz="2000" dirty="0">
                 <a:solidFill>
                   <a:srgbClr val="141B26"/>
                 </a:solidFill>
               </a:rPr>
               <a:t>Stretch: aphids and yield; selective herbicides; improving the investigation.</a:t>
             </a:r>
-            <a:endParaRPr lang="en-US" sz="1700" dirty="0"/>
+            <a:endParaRPr lang="en-US" sz="2000" dirty="0"/>
           </a:p>
         </p:txBody>
       </p:sp>
@@ -4414,23 +4400,21 @@
           <a:ln/>
         </p:spPr>
         <p:txBody>
-          <a:bodyPr wrap="square" lIns="0" tIns="0" rIns="0" bIns="0" rtlCol="0" anchor="t">
-            <a:normAutofit/>
-          </a:bodyPr>
+          <a:bodyPr wrap="square" lIns="0" tIns="0" rIns="0" bIns="0" rtlCol="0" anchor="t"/>
           <a:lstStyle/>
           <a:p>
             <a:pPr indent="0" marL="0">
               <a:buNone/>
             </a:pPr>
             <a:r>
-              <a:rPr lang="en-US" sz="1700" dirty="0">
+              <a:rPr lang="en-US" sz="2000" dirty="0">
                 <a:solidFill>
                   <a:srgbClr val="141B26"/>
                 </a:solidFill>
               </a:rPr>
               <a:t>Challenge: breeding a yellow sweet apple; 35% more food since 1973.</a:t>
             </a:r>
-            <a:endParaRPr lang="en-US" sz="1700" dirty="0"/>
+            <a:endParaRPr lang="en-US" sz="2000" dirty="0"/>
           </a:p>
         </p:txBody>
       </p:sp>
@@ -4513,23 +4497,21 @@
           <a:ln/>
         </p:spPr>
         <p:txBody>
-          <a:bodyPr wrap="square" lIns="0" tIns="0" rIns="0" bIns="0" rtlCol="0" anchor="t">
-            <a:normAutofit/>
-          </a:bodyPr>
+          <a:bodyPr wrap="square" lIns="0" tIns="0" rIns="0" bIns="0" rtlCol="0" anchor="t"/>
           <a:lstStyle/>
           <a:p>
             <a:pPr indent="0" marL="0">
               <a:buNone/>
             </a:pPr>
             <a:r>
-              <a:rPr lang="en-US" sz="1700" dirty="0">
+              <a:rPr lang="en-US" sz="2000" dirty="0">
                 <a:solidFill>
                   <a:srgbClr val="141B26"/>
                 </a:solidFill>
               </a:rPr>
               <a:t>Finished? Answer the My thinking question about the ecological audit.</a:t>
             </a:r>
-            <a:endParaRPr lang="en-US" sz="1700" dirty="0"/>
+            <a:endParaRPr lang="en-US" sz="2000" dirty="0"/>
           </a:p>
         </p:txBody>
       </p:sp>
@@ -4558,14 +4540,14 @@
               <a:buNone/>
             </a:pPr>
             <a:r>
-              <a:rPr lang="en-US" sz="1300" i="1" dirty="0">
+              <a:rPr lang="en-US" sz="1500" i="1" dirty="0">
                 <a:solidFill>
                   <a:srgbClr val="5B6574"/>
                 </a:solidFill>
               </a:rPr>
               <a:t>Bar chart: the four groups are separate categories, so leave gaps between the bars. Label both axes with units.</a:t>
             </a:r>
-            <a:endParaRPr lang="en-US" sz="1300" dirty="0"/>
+            <a:endParaRPr lang="en-US" sz="1500" dirty="0"/>
           </a:p>
         </p:txBody>
       </p:sp>
@@ -4758,23 +4740,21 @@
           <a:ln/>
         </p:spPr>
         <p:txBody>
-          <a:bodyPr wrap="square" lIns="0" tIns="0" rIns="0" bIns="0" rtlCol="0" anchor="t">
-            <a:normAutofit/>
-          </a:bodyPr>
+          <a:bodyPr wrap="square" lIns="0" tIns="0" rIns="0" bIns="0" rtlCol="0" anchor="t"/>
           <a:lstStyle/>
           <a:p>
             <a:pPr indent="0" marL="0">
               <a:buNone/>
             </a:pPr>
             <a:r>
-              <a:rPr lang="en-US" sz="2200" b="1" dirty="0">
+              <a:rPr lang="en-US" sz="2600" b="1" dirty="0">
                 <a:solidFill>
                   <a:srgbClr val="0F2A5F"/>
                 </a:solidFill>
               </a:rPr>
               <a:t>Group 4 added 8 drops and got less growth than group 3 with 6 drops. What would you advise a farmer about how much fertiliser to use? What would you change in the investigation to be more sure?</a:t>
             </a:r>
-            <a:endParaRPr lang="en-US" sz="2200" dirty="0"/>
+            <a:endParaRPr lang="en-US" sz="2600" dirty="0"/>
           </a:p>
         </p:txBody>
       </p:sp>
@@ -4823,9 +4803,7 @@
           <a:ln/>
         </p:spPr>
         <p:txBody>
-          <a:bodyPr wrap="square" lIns="0" tIns="0" rIns="0" bIns="0" rtlCol="0" anchor="t">
-            <a:normAutofit/>
-          </a:bodyPr>
+          <a:bodyPr wrap="square" lIns="0" tIns="0" rIns="0" bIns="0" rtlCol="0" anchor="t"/>
           <a:lstStyle/>
           <a:p>
             <a:pPr indent="0" marL="0">
@@ -4835,14 +4813,14 @@
               <a:buNone/>
             </a:pPr>
             <a:r>
-              <a:rPr lang="en-US" sz="1500" b="1" dirty="0">
+              <a:rPr lang="en-US" sz="1800" b="1" dirty="0">
                 <a:solidFill>
                   <a:srgbClr val="7B3A8E"/>
                 </a:solidFill>
               </a:rPr>
               <a:t>Sentence frames</a:t>
             </a:r>
-            <a:endParaRPr lang="en-US" sz="1500" dirty="0"/>
+            <a:endParaRPr lang="en-US" sz="1800" dirty="0"/>
           </a:p>
           <a:p>
             <a:pPr indent="0" marL="0">
@@ -4852,14 +4830,14 @@
               <a:buNone/>
             </a:pPr>
             <a:r>
-              <a:rPr lang="en-US" sz="1500" dirty="0">
+              <a:rPr lang="en-US" sz="1800" dirty="0">
                 <a:solidFill>
                   <a:srgbClr val="141B26"/>
                 </a:solidFill>
               </a:rPr>
               <a:t>I would advise the farmer to ___ because ___.</a:t>
             </a:r>
-            <a:endParaRPr lang="en-US" sz="1500" dirty="0"/>
+            <a:endParaRPr lang="en-US" sz="1800" dirty="0"/>
           </a:p>
           <a:p>
             <a:pPr indent="0" marL="0">
@@ -4869,14 +4847,14 @@
               <a:buNone/>
             </a:pPr>
             <a:r>
-              <a:rPr lang="en-US" sz="1500" dirty="0">
+              <a:rPr lang="en-US" sz="1800" dirty="0">
                 <a:solidFill>
                   <a:srgbClr val="141B26"/>
                 </a:solidFill>
               </a:rPr>
               <a:t>To be more sure, I would ___ because ___.</a:t>
             </a:r>
-            <a:endParaRPr lang="en-US" sz="1500" dirty="0"/>
+            <a:endParaRPr lang="en-US" sz="1800" dirty="0"/>
           </a:p>
           <a:p>
             <a:pPr indent="0" marL="0">
@@ -4886,14 +4864,14 @@
               <a:buNone/>
             </a:pPr>
             <a:r>
-              <a:rPr lang="en-US" sz="1500" dirty="0">
+              <a:rPr lang="en-US" sz="1800" dirty="0">
                 <a:solidFill>
                   <a:srgbClr val="141B26"/>
                 </a:solidFill>
               </a:rPr>
               <a:t>One thing we do not know is ___.</a:t>
             </a:r>
-            <a:endParaRPr lang="en-US" sz="1500" dirty="0"/>
+            <a:endParaRPr lang="en-US" sz="1800" dirty="0"/>
           </a:p>
         </p:txBody>
       </p:sp>
@@ -5093,14 +5071,14 @@
               <a:buNone/>
             </a:pPr>
             <a:r>
-              <a:rPr lang="en-US" sz="1400" i="1" dirty="0">
+              <a:rPr lang="en-US" sz="1600" i="1" dirty="0">
                 <a:solidFill>
                   <a:srgbClr val="5B6574"/>
                 </a:solidFill>
               </a:rPr>
               <a:t>On your worksheet exit ticket. Work alone. Hand it in as you leave.</a:t>
             </a:r>
-            <a:endParaRPr lang="en-US" sz="1400" dirty="0"/>
+            <a:endParaRPr lang="en-US" sz="1600" dirty="0"/>
           </a:p>
         </p:txBody>
       </p:sp>
@@ -5113,25 +5091,23 @@
         <p:spPr>
           <a:xfrm>
             <a:off x="548640" y="1828800"/>
-            <a:ext cx="10881360" cy="1188720"/>
-          </a:xfrm>
-          <a:prstGeom prst="rect">
-            <a:avLst/>
-          </a:prstGeom>
-          <a:noFill/>
-          <a:ln/>
-        </p:spPr>
-        <p:txBody>
-          <a:bodyPr wrap="square" lIns="0" tIns="0" rIns="0" bIns="0" rtlCol="0" anchor="t">
-            <a:normAutofit/>
-          </a:bodyPr>
+            <a:ext cx="9692640" cy="1188720"/>
+          </a:xfrm>
+          <a:prstGeom prst="rect">
+            <a:avLst/>
+          </a:prstGeom>
+          <a:noFill/>
+          <a:ln/>
+        </p:spPr>
+        <p:txBody>
+          <a:bodyPr wrap="square" lIns="0" tIns="0" rIns="0" bIns="0" rtlCol="0" anchor="t"/>
           <a:lstStyle/>
           <a:p>
             <a:pPr indent="0" marL="0">
               <a:buNone/>
             </a:pPr>
             <a:r>
-              <a:rPr lang="en-US" sz="1800" b="1" dirty="0">
+              <a:rPr lang="en-US" sz="2200" b="1" dirty="0">
                 <a:solidFill>
                   <a:srgbClr val="7B3A8E"/>
                 </a:solidFill>
@@ -5142,14 +5118,14 @@
               <a:buNone/>
             </a:pPr>
             <a:r>
-              <a:rPr lang="en-US" sz="1800" dirty="0">
+              <a:rPr lang="en-US" sz="2200" dirty="0">
                 <a:solidFill>
                   <a:srgbClr val="141B26"/>
                 </a:solidFill>
               </a:rPr>
               <a:t>What do fertilisers contain that helps plants grow?</a:t>
             </a:r>
-            <a:endParaRPr lang="en-US" sz="1800" dirty="0"/>
+            <a:endParaRPr lang="en-US" sz="2200" dirty="0"/>
           </a:p>
         </p:txBody>
       </p:sp>
@@ -5162,25 +5138,23 @@
         <p:spPr>
           <a:xfrm>
             <a:off x="548640" y="3017520"/>
-            <a:ext cx="10881360" cy="1188720"/>
-          </a:xfrm>
-          <a:prstGeom prst="rect">
-            <a:avLst/>
-          </a:prstGeom>
-          <a:noFill/>
-          <a:ln/>
-        </p:spPr>
-        <p:txBody>
-          <a:bodyPr wrap="square" lIns="0" tIns="0" rIns="0" bIns="0" rtlCol="0" anchor="t">
-            <a:normAutofit/>
-          </a:bodyPr>
+            <a:ext cx="9692640" cy="1188720"/>
+          </a:xfrm>
+          <a:prstGeom prst="rect">
+            <a:avLst/>
+          </a:prstGeom>
+          <a:noFill/>
+          <a:ln/>
+        </p:spPr>
+        <p:txBody>
+          <a:bodyPr wrap="square" lIns="0" tIns="0" rIns="0" bIns="0" rtlCol="0" anchor="t"/>
           <a:lstStyle/>
           <a:p>
             <a:pPr indent="0" marL="0">
               <a:buNone/>
             </a:pPr>
             <a:r>
-              <a:rPr lang="en-US" sz="1800" b="1" dirty="0">
+              <a:rPr lang="en-US" sz="2200" b="1" dirty="0">
                 <a:solidFill>
                   <a:srgbClr val="7B3A8E"/>
                 </a:solidFill>
@@ -5191,14 +5165,14 @@
               <a:buNone/>
             </a:pPr>
             <a:r>
-              <a:rPr lang="en-US" sz="1800" dirty="0">
+              <a:rPr lang="en-US" sz="2200" dirty="0">
                 <a:solidFill>
                   <a:srgbClr val="141B26"/>
                 </a:solidFill>
               </a:rPr>
               <a:t>What do herbicides kill, and why does this help the crop?</a:t>
             </a:r>
-            <a:endParaRPr lang="en-US" sz="1800" dirty="0"/>
+            <a:endParaRPr lang="en-US" sz="2200" dirty="0"/>
           </a:p>
         </p:txBody>
       </p:sp>
@@ -5211,25 +5185,23 @@
         <p:spPr>
           <a:xfrm>
             <a:off x="548640" y="4206240"/>
-            <a:ext cx="10881360" cy="1188720"/>
-          </a:xfrm>
-          <a:prstGeom prst="rect">
-            <a:avLst/>
-          </a:prstGeom>
-          <a:noFill/>
-          <a:ln/>
-        </p:spPr>
-        <p:txBody>
-          <a:bodyPr wrap="square" lIns="0" tIns="0" rIns="0" bIns="0" rtlCol="0" anchor="t">
-            <a:normAutofit/>
-          </a:bodyPr>
+            <a:ext cx="9692640" cy="1188720"/>
+          </a:xfrm>
+          <a:prstGeom prst="rect">
+            <a:avLst/>
+          </a:prstGeom>
+          <a:noFill/>
+          <a:ln/>
+        </p:spPr>
+        <p:txBody>
+          <a:bodyPr wrap="square" lIns="0" tIns="0" rIns="0" bIns="0" rtlCol="0" anchor="t"/>
           <a:lstStyle/>
           <a:p>
             <a:pPr indent="0" marL="0">
               <a:buNone/>
             </a:pPr>
             <a:r>
-              <a:rPr lang="en-US" sz="1800" b="1" dirty="0">
+              <a:rPr lang="en-US" sz="2200" b="1" dirty="0">
                 <a:solidFill>
                   <a:srgbClr val="7B3A8E"/>
                 </a:solidFill>
@@ -5240,14 +5212,14 @@
               <a:buNone/>
             </a:pPr>
             <a:r>
-              <a:rPr lang="en-US" sz="1800" dirty="0">
+              <a:rPr lang="en-US" sz="2200" dirty="0">
                 <a:solidFill>
                   <a:srgbClr val="141B26"/>
                 </a:solidFill>
               </a:rPr>
               <a:t>Describe one step in selective breeding.</a:t>
             </a:r>
-            <a:endParaRPr lang="en-US" sz="1800" dirty="0"/>
+            <a:endParaRPr lang="en-US" sz="2200" dirty="0"/>
           </a:p>
         </p:txBody>
       </p:sp>
@@ -5506,108 +5478,106 @@
         <p:spPr>
           <a:xfrm>
             <a:off x="548640" y="1371600"/>
-            <a:ext cx="10881360" cy="4480560"/>
-          </a:xfrm>
-          <a:prstGeom prst="rect">
-            <a:avLst/>
-          </a:prstGeom>
-          <a:noFill/>
-          <a:ln/>
-        </p:spPr>
-        <p:txBody>
-          <a:bodyPr wrap="square" lIns="0" tIns="0" rIns="0" bIns="0" rtlCol="0" anchor="t">
-            <a:normAutofit/>
-          </a:bodyPr>
+            <a:ext cx="10881360" cy="4114800"/>
+          </a:xfrm>
+          <a:prstGeom prst="rect">
+            <a:avLst/>
+          </a:prstGeom>
+          <a:noFill/>
+          <a:ln/>
+        </p:spPr>
+        <p:txBody>
+          <a:bodyPr wrap="square" lIns="0" tIns="0" rIns="0" bIns="0" rtlCol="0" anchor="t"/>
           <a:lstStyle/>
           <a:p>
             <a:pPr marL="342900" indent="-342900">
               <a:spcAft>
-                <a:spcPts val="1000"/>
+                <a:spcPts val="1200"/>
               </a:spcAft>
               <a:buSzPct val="100000"/>
               <a:buChar char="✓"/>
             </a:pPr>
             <a:r>
-              <a:rPr lang="en-US" sz="1700" dirty="0">
+              <a:rPr lang="en-US" sz="2000" dirty="0">
                 <a:solidFill>
                   <a:srgbClr val="141B26"/>
                 </a:solidFill>
               </a:rPr>
               <a:t>Yield is raised by fertilisers (mineral salts), greenhouses, machines and clearing land.</a:t>
             </a:r>
-            <a:endParaRPr lang="en-US" sz="1700" dirty="0"/>
+            <a:endParaRPr lang="en-US" sz="2000" dirty="0"/>
           </a:p>
           <a:p>
             <a:pPr marL="342900" indent="-342900">
               <a:spcAft>
-                <a:spcPts val="1000"/>
+                <a:spcPts val="1200"/>
               </a:spcAft>
               <a:buSzPct val="100000"/>
               <a:buChar char="✓"/>
             </a:pPr>
             <a:r>
-              <a:rPr lang="en-US" sz="1700" dirty="0">
+              <a:rPr lang="en-US" sz="2000" dirty="0">
                 <a:solidFill>
                   <a:srgbClr val="141B26"/>
                 </a:solidFill>
               </a:rPr>
               <a:t>Too much fertiliser can reduce growth: there is an optimum amount.</a:t>
             </a:r>
-            <a:endParaRPr lang="en-US" sz="1700" dirty="0"/>
+            <a:endParaRPr lang="en-US" sz="2000" dirty="0"/>
           </a:p>
           <a:p>
             <a:pPr marL="342900" indent="-342900">
               <a:spcAft>
-                <a:spcPts val="1000"/>
+                <a:spcPts val="1200"/>
               </a:spcAft>
               <a:buSzPct val="100000"/>
               <a:buChar char="✓"/>
             </a:pPr>
             <a:r>
-              <a:rPr lang="en-US" sz="1700" dirty="0">
+              <a:rPr lang="en-US" sz="2000" dirty="0">
                 <a:solidFill>
                   <a:srgbClr val="141B26"/>
                 </a:solidFill>
               </a:rPr>
               <a:t>Pesticides kill pests: insecticides, fungicides and herbicides; selective herbicides spare narrow-leaved crops.</a:t>
             </a:r>
-            <a:endParaRPr lang="en-US" sz="1700" dirty="0"/>
+            <a:endParaRPr lang="en-US" sz="2000" dirty="0"/>
           </a:p>
           <a:p>
             <a:pPr marL="342900" indent="-342900">
               <a:spcAft>
-                <a:spcPts val="1000"/>
+                <a:spcPts val="1200"/>
               </a:spcAft>
               <a:buSzPct val="100000"/>
               <a:buChar char="✓"/>
             </a:pPr>
             <a:r>
-              <a:rPr lang="en-US" sz="1700" dirty="0">
+              <a:rPr lang="en-US" sz="2000" dirty="0">
                 <a:solidFill>
                   <a:srgbClr val="141B26"/>
                 </a:solidFill>
               </a:rPr>
               <a:t>New varieties come from cross-breeding and selective breeding over many generations.</a:t>
             </a:r>
-            <a:endParaRPr lang="en-US" sz="1700" dirty="0"/>
+            <a:endParaRPr lang="en-US" sz="2000" dirty="0"/>
           </a:p>
           <a:p>
             <a:pPr marL="342900" indent="-342900">
               <a:spcAft>
-                <a:spcPts val="1000"/>
+                <a:spcPts val="1200"/>
               </a:spcAft>
               <a:buSzPct val="100000"/>
               <a:buChar char="✓"/>
             </a:pPr>
             <a:r>
-              <a:rPr lang="en-US" sz="1700" dirty="0">
+              <a:rPr lang="en-US" sz="2000" dirty="0">
                 <a:solidFill>
                   <a:srgbClr val="141B26"/>
                 </a:solidFill>
               </a:rPr>
               <a:t>Farming must be balanced against protecting wild plants, especially endemic species.</a:t>
             </a:r>
-            <a:endParaRPr lang="en-US" sz="1700" dirty="0"/>
+            <a:endParaRPr lang="en-US" sz="2000" dirty="0"/>
           </a:p>
         </p:txBody>
       </p:sp>
@@ -5636,7 +5606,7 @@
               <a:buNone/>
             </a:pPr>
             <a:r>
-              <a:rPr lang="en-US" sz="1300" b="1" dirty="0">
+              <a:rPr lang="en-US" sz="1400" b="1" dirty="0">
                 <a:solidFill>
                   <a:srgbClr val="7B3A8E"/>
                 </a:solidFill>
@@ -5647,14 +5617,14 @@
               <a:buNone/>
             </a:pPr>
             <a:r>
-              <a:rPr lang="en-US" sz="1300" dirty="0">
+              <a:rPr lang="en-US" sz="1400" dirty="0">
                 <a:solidFill>
                   <a:srgbClr val="141B26"/>
                 </a:solidFill>
               </a:rPr>
               <a:t>Farming problems: fertiliser in rivers, persistent pesticides, single varieties and the carbon cycle.</a:t>
             </a:r>
-            <a:endParaRPr lang="en-US" sz="1300" dirty="0"/>
+            <a:endParaRPr lang="en-US" sz="1400" dirty="0"/>
           </a:p>
         </p:txBody>
       </p:sp>
@@ -5922,60 +5892,58 @@
           <a:ln/>
         </p:spPr>
         <p:txBody>
-          <a:bodyPr wrap="square" lIns="0" tIns="0" rIns="0" bIns="0" rtlCol="0" anchor="t">
-            <a:normAutofit/>
-          </a:bodyPr>
+          <a:bodyPr wrap="square" lIns="0" tIns="0" rIns="0" bIns="0" rtlCol="0" anchor="t"/>
           <a:lstStyle/>
           <a:p>
             <a:pPr indent="0" marL="0">
               <a:spcAft>
-                <a:spcPts val="1000"/>
+                <a:spcPts val="1200"/>
               </a:spcAft>
               <a:buNone/>
             </a:pPr>
             <a:r>
-              <a:rPr lang="en-US" sz="2000" dirty="0">
+              <a:rPr lang="en-US" sz="2400" dirty="0">
                 <a:solidFill>
                   <a:srgbClr val="141B26"/>
                 </a:solidFill>
               </a:rPr>
               <a:t>1. What does the yield of a crop mean?</a:t>
             </a:r>
-            <a:endParaRPr lang="en-US" sz="2000" dirty="0"/>
+            <a:endParaRPr lang="en-US" sz="2400" dirty="0"/>
           </a:p>
           <a:p>
             <a:pPr indent="0" marL="0">
               <a:spcAft>
-                <a:spcPts val="1000"/>
+                <a:spcPts val="1200"/>
               </a:spcAft>
               <a:buNone/>
             </a:pPr>
             <a:r>
-              <a:rPr lang="en-US" sz="2000" dirty="0">
+              <a:rPr lang="en-US" sz="2400" dirty="0">
                 <a:solidFill>
                   <a:srgbClr val="141B26"/>
                 </a:solidFill>
               </a:rPr>
               <a:t>2. Name three things a crop plant needs that a farmer can provide.</a:t>
             </a:r>
-            <a:endParaRPr lang="en-US" sz="2000" dirty="0"/>
+            <a:endParaRPr lang="en-US" sz="2400" dirty="0"/>
           </a:p>
           <a:p>
             <a:pPr indent="0" marL="0">
               <a:spcAft>
-                <a:spcPts val="1000"/>
+                <a:spcPts val="1200"/>
               </a:spcAft>
               <a:buNone/>
             </a:pPr>
             <a:r>
-              <a:rPr lang="en-US" sz="2000" dirty="0">
+              <a:rPr lang="en-US" sz="2400" dirty="0">
                 <a:solidFill>
                   <a:srgbClr val="141B26"/>
                 </a:solidFill>
               </a:rPr>
               <a:t>3. Suggest why a farmer might remove a hedge from the edge of a field.</a:t>
             </a:r>
-            <a:endParaRPr lang="en-US" sz="2000" dirty="0"/>
+            <a:endParaRPr lang="en-US" sz="2400" dirty="0"/>
           </a:p>
         </p:txBody>
       </p:sp>
@@ -6012,7 +5980,7 @@
         <p:spPr>
           <a:xfrm>
             <a:off x="6858000" y="4969014"/>
-            <a:ext cx="4754880" cy="502920"/>
+            <a:ext cx="4754880" cy="548640"/>
           </a:xfrm>
           <a:prstGeom prst="rect">
             <a:avLst/>
@@ -6028,7 +5996,7 @@
               <a:buNone/>
             </a:pPr>
             <a:r>
-              <a:rPr lang="en-US" sz="1100" dirty="0">
+              <a:rPr lang="en-US" sz="1300" dirty="0">
                 <a:solidFill>
                   <a:srgbClr val="141B26"/>
                 </a:solidFill>
@@ -6038,21 +6006,21 @@
             <a:pPr algn="l" indent="0" marL="0">
               <a:buNone/>
             </a:pPr>
-            <a:endParaRPr lang="en-US" sz="1100" dirty="0"/>
+            <a:endParaRPr lang="en-US" sz="1300" dirty="0"/>
           </a:p>
           <a:p>
             <a:pPr algn="l" indent="0" marL="0">
               <a:buNone/>
             </a:pPr>
             <a:r>
-              <a:rPr lang="en-US" sz="800" dirty="0">
+              <a:rPr lang="en-US" sz="900" dirty="0">
                 <a:solidFill>
                   <a:srgbClr val="5B6574"/>
                 </a:solidFill>
               </a:rPr>
               <a:t>Image: eutrophication&amp;hypoxia, CC BY 2.0, via Wikimedia Commons</a:t>
             </a:r>
-            <a:endParaRPr lang="en-US" sz="1100" dirty="0"/>
+            <a:endParaRPr lang="en-US" sz="1300" dirty="0"/>
           </a:p>
         </p:txBody>
       </p:sp>
@@ -6235,8 +6203,8 @@
         </p:nvSpPr>
         <p:spPr>
           <a:xfrm>
-            <a:off x="548640" y="1325880"/>
-            <a:ext cx="5669280" cy="457200"/>
+            <a:off x="548640" y="1280160"/>
+            <a:ext cx="5486400" cy="411480"/>
           </a:xfrm>
           <a:prstGeom prst="rect">
             <a:avLst/>
@@ -6252,14 +6220,14 @@
               <a:buNone/>
             </a:pPr>
             <a:r>
-              <a:rPr lang="en-US" sz="2000" b="1" dirty="0">
+              <a:rPr lang="en-US" sz="2200" b="1" dirty="0">
                 <a:solidFill>
                   <a:srgbClr val="7B3A8E"/>
                 </a:solidFill>
               </a:rPr>
               <a:t>Today I can ...</a:t>
             </a:r>
-            <a:endParaRPr lang="en-US" sz="2000" dirty="0"/>
+            <a:endParaRPr lang="en-US" sz="2200" dirty="0"/>
           </a:p>
         </p:txBody>
       </p:sp>
@@ -6271,8 +6239,8 @@
         </p:nvSpPr>
         <p:spPr>
           <a:xfrm>
-            <a:off x="594360" y="1947672"/>
-            <a:ext cx="292608" cy="292608"/>
+            <a:off x="594360" y="1810512"/>
+            <a:ext cx="310896" cy="310896"/>
           </a:xfrm>
           <a:prstGeom prst="rect">
             <a:avLst/>
@@ -6296,33 +6264,31 @@
         </p:nvSpPr>
         <p:spPr>
           <a:xfrm>
-            <a:off x="1051560" y="1874520"/>
-            <a:ext cx="5120640" cy="868680"/>
-          </a:xfrm>
-          <a:prstGeom prst="rect">
-            <a:avLst/>
-          </a:prstGeom>
-          <a:noFill/>
-          <a:ln/>
-        </p:spPr>
-        <p:txBody>
-          <a:bodyPr wrap="square" lIns="0" tIns="0" rIns="0" bIns="0" rtlCol="0" anchor="t">
-            <a:normAutofit/>
-          </a:bodyPr>
+            <a:off x="1097280" y="1737360"/>
+            <a:ext cx="10332720" cy="868680"/>
+          </a:xfrm>
+          <a:prstGeom prst="rect">
+            <a:avLst/>
+          </a:prstGeom>
+          <a:noFill/>
+          <a:ln/>
+        </p:spPr>
+        <p:txBody>
+          <a:bodyPr wrap="square" lIns="0" tIns="0" rIns="0" bIns="0" rtlCol="0" anchor="t"/>
           <a:lstStyle/>
           <a:p>
             <a:pPr indent="0" marL="0">
               <a:buNone/>
             </a:pPr>
             <a:r>
-              <a:rPr lang="en-US" sz="1600" dirty="0">
+              <a:rPr lang="en-US" sz="2000" dirty="0">
                 <a:solidFill>
                   <a:srgbClr val="141B26"/>
                 </a:solidFill>
               </a:rPr>
               <a:t>I can explain how fertilisers, pesticides, greenhouses and machines increase crop yield, and how pests and population growth change the food supply.</a:t>
             </a:r>
-            <a:endParaRPr lang="en-US" sz="1600" dirty="0"/>
+            <a:endParaRPr lang="en-US" sz="2000" dirty="0"/>
           </a:p>
         </p:txBody>
       </p:sp>
@@ -6334,8 +6300,8 @@
         </p:nvSpPr>
         <p:spPr>
           <a:xfrm>
-            <a:off x="594360" y="2907792"/>
-            <a:ext cx="292608" cy="292608"/>
+            <a:off x="594360" y="2679192"/>
+            <a:ext cx="310896" cy="310896"/>
           </a:xfrm>
           <a:prstGeom prst="rect">
             <a:avLst/>
@@ -6359,33 +6325,31 @@
         </p:nvSpPr>
         <p:spPr>
           <a:xfrm>
-            <a:off x="1051560" y="2834640"/>
-            <a:ext cx="5120640" cy="868680"/>
-          </a:xfrm>
-          <a:prstGeom prst="rect">
-            <a:avLst/>
-          </a:prstGeom>
-          <a:noFill/>
-          <a:ln/>
-        </p:spPr>
-        <p:txBody>
-          <a:bodyPr wrap="square" lIns="0" tIns="0" rIns="0" bIns="0" rtlCol="0" anchor="t">
-            <a:normAutofit/>
-          </a:bodyPr>
+            <a:off x="1097280" y="2606040"/>
+            <a:ext cx="10332720" cy="868680"/>
+          </a:xfrm>
+          <a:prstGeom prst="rect">
+            <a:avLst/>
+          </a:prstGeom>
+          <a:noFill/>
+          <a:ln/>
+        </p:spPr>
+        <p:txBody>
+          <a:bodyPr wrap="square" lIns="0" tIns="0" rIns="0" bIns="0" rtlCol="0" anchor="t"/>
           <a:lstStyle/>
           <a:p>
             <a:pPr indent="0" marL="0">
               <a:buNone/>
             </a:pPr>
             <a:r>
-              <a:rPr lang="en-US" sz="1600" dirty="0">
+              <a:rPr lang="en-US" sz="2000" dirty="0">
                 <a:solidFill>
                   <a:srgbClr val="141B26"/>
                 </a:solidFill>
               </a:rPr>
               <a:t>I can describe how new varieties are made by cross-breeding and selective breeding, and interpret the results of a fertiliser investigation.</a:t>
             </a:r>
-            <a:endParaRPr lang="en-US" sz="1600" dirty="0"/>
+            <a:endParaRPr lang="en-US" sz="2000" dirty="0"/>
           </a:p>
         </p:txBody>
       </p:sp>
@@ -6397,8 +6361,8 @@
         </p:nvSpPr>
         <p:spPr>
           <a:xfrm>
-            <a:off x="6583680" y="1325880"/>
-            <a:ext cx="5029200" cy="457200"/>
+            <a:off x="548640" y="3611880"/>
+            <a:ext cx="5486400" cy="411480"/>
           </a:xfrm>
           <a:prstGeom prst="rect">
             <a:avLst/>
@@ -6414,14 +6378,14 @@
               <a:buNone/>
             </a:pPr>
             <a:r>
-              <a:rPr lang="en-US" sz="2000" b="1" dirty="0">
+              <a:rPr lang="en-US" sz="2200" b="1" dirty="0">
                 <a:solidFill>
                   <a:srgbClr val="7B3A8E"/>
                 </a:solidFill>
               </a:rPr>
               <a:t>Key words today</a:t>
             </a:r>
-            <a:endParaRPr lang="en-US" sz="2000" dirty="0"/>
+            <a:endParaRPr lang="en-US" sz="2200" dirty="0"/>
           </a:p>
         </p:txBody>
       </p:sp>
@@ -6433,360 +6397,295 @@
         </p:nvSpPr>
         <p:spPr>
           <a:xfrm>
-            <a:off x="6583680" y="1874520"/>
-            <a:ext cx="5029200" cy="4023360"/>
-          </a:xfrm>
-          <a:prstGeom prst="rect">
-            <a:avLst/>
-          </a:prstGeom>
-          <a:noFill/>
-          <a:ln/>
-        </p:spPr>
-        <p:txBody>
-          <a:bodyPr wrap="square" lIns="0" tIns="0" rIns="0" bIns="0" rtlCol="0" anchor="t">
-            <a:normAutofit/>
-          </a:bodyPr>
+            <a:off x="548640" y="4069080"/>
+            <a:ext cx="3515258" cy="1920240"/>
+          </a:xfrm>
+          <a:prstGeom prst="rect">
+            <a:avLst/>
+          </a:prstGeom>
+          <a:noFill/>
+          <a:ln/>
+        </p:spPr>
+        <p:txBody>
+          <a:bodyPr wrap="square" lIns="0" tIns="0" rIns="0" bIns="0" rtlCol="0" anchor="t"/>
+          <a:lstStyle/>
+          <a:p>
+            <a:pPr marL="304800" indent="-304800">
+              <a:spcAft>
+                <a:spcPts val="600"/>
+              </a:spcAft>
+              <a:buSzPct val="100000"/>
+              <a:buChar char="•"/>
+            </a:pPr>
+            <a:r>
+              <a:rPr lang="en-US" sz="2100" b="1" dirty="0">
+                <a:solidFill>
+                  <a:srgbClr val="0F2A5F"/>
+                </a:solidFill>
+              </a:rPr>
+              <a:t>yield</a:t>
+            </a:r>
+            <a:endParaRPr lang="en-US" sz="2100" dirty="0"/>
+          </a:p>
+          <a:p>
+            <a:pPr marL="304800" indent="-304800">
+              <a:spcAft>
+                <a:spcPts val="600"/>
+              </a:spcAft>
+              <a:buSzPct val="100000"/>
+              <a:buChar char="•"/>
+            </a:pPr>
+            <a:r>
+              <a:rPr lang="en-US" sz="2100" b="1" dirty="0">
+                <a:solidFill>
+                  <a:srgbClr val="0F2A5F"/>
+                </a:solidFill>
+              </a:rPr>
+              <a:t>fertiliser</a:t>
+            </a:r>
+            <a:endParaRPr lang="en-US" sz="2100" dirty="0"/>
+          </a:p>
+          <a:p>
+            <a:pPr marL="304800" indent="-304800">
+              <a:spcAft>
+                <a:spcPts val="600"/>
+              </a:spcAft>
+              <a:buSzPct val="100000"/>
+              <a:buChar char="•"/>
+            </a:pPr>
+            <a:r>
+              <a:rPr lang="en-US" sz="2100" b="1" dirty="0">
+                <a:solidFill>
+                  <a:srgbClr val="0F2A5F"/>
+                </a:solidFill>
+              </a:rPr>
+              <a:t>manure</a:t>
+            </a:r>
+            <a:endParaRPr lang="en-US" sz="2100" dirty="0"/>
+          </a:p>
+          <a:p>
+            <a:pPr marL="304800" indent="-304800">
+              <a:spcAft>
+                <a:spcPts val="600"/>
+              </a:spcAft>
+              <a:buSzPct val="100000"/>
+              <a:buChar char="•"/>
+            </a:pPr>
+            <a:r>
+              <a:rPr lang="en-US" sz="2100" b="1" dirty="0">
+                <a:solidFill>
+                  <a:srgbClr val="0F2A5F"/>
+                </a:solidFill>
+              </a:rPr>
+              <a:t>decomposer</a:t>
+            </a:r>
+            <a:endParaRPr lang="en-US" sz="2100" dirty="0"/>
+          </a:p>
+        </p:txBody>
+      </p:sp>
+      <p:sp>
+        <p:nvSpPr>
+          <p:cNvPr id="12" name="Text 10"/>
+          <p:cNvSpPr txBox="1"/>
+          <p:nvPr/>
+        </p:nvSpPr>
+        <p:spPr>
+          <a:xfrm>
+            <a:off x="4338218" y="4069080"/>
+            <a:ext cx="3515258" cy="1920240"/>
+          </a:xfrm>
+          <a:prstGeom prst="rect">
+            <a:avLst/>
+          </a:prstGeom>
+          <a:noFill/>
+          <a:ln/>
+        </p:spPr>
+        <p:txBody>
+          <a:bodyPr wrap="square" lIns="0" tIns="0" rIns="0" bIns="0" rtlCol="0" anchor="t"/>
+          <a:lstStyle/>
+          <a:p>
+            <a:pPr marL="304800" indent="-304800">
+              <a:spcAft>
+                <a:spcPts val="600"/>
+              </a:spcAft>
+              <a:buSzPct val="100000"/>
+              <a:buChar char="•"/>
+            </a:pPr>
+            <a:r>
+              <a:rPr lang="en-US" sz="2100" b="1" dirty="0">
+                <a:solidFill>
+                  <a:srgbClr val="0F2A5F"/>
+                </a:solidFill>
+              </a:rPr>
+              <a:t>pesticide</a:t>
+            </a:r>
+            <a:endParaRPr lang="en-US" sz="2100" dirty="0"/>
+          </a:p>
+          <a:p>
+            <a:pPr marL="304800" indent="-304800">
+              <a:spcAft>
+                <a:spcPts val="600"/>
+              </a:spcAft>
+              <a:buSzPct val="100000"/>
+              <a:buChar char="•"/>
+            </a:pPr>
+            <a:r>
+              <a:rPr lang="en-US" sz="2100" b="1" dirty="0">
+                <a:solidFill>
+                  <a:srgbClr val="0F2A5F"/>
+                </a:solidFill>
+              </a:rPr>
+              <a:t>insecticide</a:t>
+            </a:r>
+            <a:endParaRPr lang="en-US" sz="2100" dirty="0"/>
+          </a:p>
+          <a:p>
+            <a:pPr marL="304800" indent="-304800">
+              <a:spcAft>
+                <a:spcPts val="600"/>
+              </a:spcAft>
+              <a:buSzPct val="100000"/>
+              <a:buChar char="•"/>
+            </a:pPr>
+            <a:r>
+              <a:rPr lang="en-US" sz="2100" b="1" dirty="0">
+                <a:solidFill>
+                  <a:srgbClr val="0F2A5F"/>
+                </a:solidFill>
+              </a:rPr>
+              <a:t>fungicide</a:t>
+            </a:r>
+            <a:endParaRPr lang="en-US" sz="2100" dirty="0"/>
+          </a:p>
+          <a:p>
+            <a:pPr marL="304800" indent="-304800">
+              <a:spcAft>
+                <a:spcPts val="600"/>
+              </a:spcAft>
+              <a:buSzPct val="100000"/>
+              <a:buChar char="•"/>
+            </a:pPr>
+            <a:r>
+              <a:rPr lang="en-US" sz="2100" b="1" dirty="0">
+                <a:solidFill>
+                  <a:srgbClr val="0F2A5F"/>
+                </a:solidFill>
+              </a:rPr>
+              <a:t>herbicide</a:t>
+            </a:r>
+            <a:endParaRPr lang="en-US" sz="2100" dirty="0"/>
+          </a:p>
+        </p:txBody>
+      </p:sp>
+      <p:sp>
+        <p:nvSpPr>
+          <p:cNvPr id="13" name="Text 11"/>
+          <p:cNvSpPr txBox="1"/>
+          <p:nvPr/>
+        </p:nvSpPr>
+        <p:spPr>
+          <a:xfrm>
+            <a:off x="8127797" y="4069080"/>
+            <a:ext cx="3515258" cy="1920240"/>
+          </a:xfrm>
+          <a:prstGeom prst="rect">
+            <a:avLst/>
+          </a:prstGeom>
+          <a:noFill/>
+          <a:ln/>
+        </p:spPr>
+        <p:txBody>
+          <a:bodyPr wrap="square" lIns="0" tIns="0" rIns="0" bIns="0" rtlCol="0" anchor="t"/>
+          <a:lstStyle/>
+          <a:p>
+            <a:pPr marL="304800" indent="-304800">
+              <a:spcAft>
+                <a:spcPts val="600"/>
+              </a:spcAft>
+              <a:buSzPct val="100000"/>
+              <a:buChar char="•"/>
+            </a:pPr>
+            <a:r>
+              <a:rPr lang="en-US" sz="2200" b="1" dirty="0">
+                <a:solidFill>
+                  <a:srgbClr val="0F2A5F"/>
+                </a:solidFill>
+              </a:rPr>
+              <a:t>weed</a:t>
+            </a:r>
+            <a:endParaRPr lang="en-US" sz="2200" dirty="0"/>
+          </a:p>
+          <a:p>
+            <a:pPr marL="304800" indent="-304800">
+              <a:spcAft>
+                <a:spcPts val="600"/>
+              </a:spcAft>
+              <a:buSzPct val="100000"/>
+              <a:buChar char="•"/>
+            </a:pPr>
+            <a:r>
+              <a:rPr lang="en-US" sz="2200" b="1" dirty="0">
+                <a:solidFill>
+                  <a:srgbClr val="0F2A5F"/>
+                </a:solidFill>
+              </a:rPr>
+              <a:t>variety</a:t>
+            </a:r>
+            <a:endParaRPr lang="en-US" sz="2200" dirty="0"/>
+          </a:p>
+          <a:p>
+            <a:pPr marL="304800" indent="-304800">
+              <a:spcAft>
+                <a:spcPts val="600"/>
+              </a:spcAft>
+              <a:buSzPct val="100000"/>
+              <a:buChar char="•"/>
+            </a:pPr>
+            <a:r>
+              <a:rPr lang="en-US" sz="2200" b="1" dirty="0">
+                <a:solidFill>
+                  <a:srgbClr val="0F2A5F"/>
+                </a:solidFill>
+              </a:rPr>
+              <a:t>selective breeding</a:t>
+            </a:r>
+            <a:endParaRPr lang="en-US" sz="2200" dirty="0"/>
+          </a:p>
+        </p:txBody>
+      </p:sp>
+      <p:sp>
+        <p:nvSpPr>
+          <p:cNvPr id="14" name="Text 12"/>
+          <p:cNvSpPr txBox="1"/>
+          <p:nvPr/>
+        </p:nvSpPr>
+        <p:spPr>
+          <a:xfrm>
+            <a:off x="548640" y="6035040"/>
+            <a:ext cx="10881360" cy="320040"/>
+          </a:xfrm>
+          <a:prstGeom prst="rect">
+            <a:avLst/>
+          </a:prstGeom>
+          <a:noFill/>
+          <a:ln/>
+        </p:spPr>
+        <p:txBody>
+          <a:bodyPr wrap="square" lIns="0" tIns="0" rIns="0" bIns="0" rtlCol="0" anchor="ctr"/>
           <a:lstStyle/>
           <a:p>
             <a:pPr indent="0" marL="0">
-              <a:spcAft>
-                <a:spcPts val="500"/>
-              </a:spcAft>
-              <a:buNone/>
-            </a:pPr>
-            <a:r>
-              <a:rPr lang="en-US" sz="1300" b="1" dirty="0">
-                <a:solidFill>
-                  <a:srgbClr val="0F2A5F"/>
-                </a:solidFill>
-              </a:rPr>
-              <a:t>yield</a:t>
-            </a:r>
-            <a:pPr indent="0" marL="0">
-              <a:spcAft>
-                <a:spcPts val="500"/>
-              </a:spcAft>
-              <a:buNone/>
-            </a:pPr>
-            <a:r>
-              <a:rPr lang="en-US" sz="1300" dirty="0">
-                <a:solidFill>
-                  <a:srgbClr val="141B26"/>
-                </a:solidFill>
-              </a:rPr>
-              <a:t>  the amount of useful product a farmer gets from a crop</a:t>
-            </a:r>
-            <a:endParaRPr lang="en-US" sz="1300" dirty="0"/>
-          </a:p>
-          <a:p>
-            <a:pPr indent="0" marL="0">
-              <a:spcAft>
-                <a:spcPts val="500"/>
-              </a:spcAft>
-              <a:buNone/>
-            </a:pPr>
-            <a:r>
-              <a:rPr lang="en-US" sz="1300" b="1" dirty="0">
-                <a:solidFill>
-                  <a:srgbClr val="0F2A5F"/>
-                </a:solidFill>
-              </a:rPr>
-              <a:t>fertiliser</a:t>
-            </a:r>
-            <a:pPr indent="0" marL="0">
-              <a:spcAft>
-                <a:spcPts val="500"/>
-              </a:spcAft>
-              <a:buNone/>
-            </a:pPr>
-            <a:r>
-              <a:rPr lang="en-US" sz="1300" dirty="0">
-                <a:solidFill>
-                  <a:srgbClr val="141B26"/>
-                </a:solidFill>
-              </a:rPr>
-              <a:t>  a substance added to soil that contains mineral salts to help plants grow</a:t>
-            </a:r>
-            <a:endParaRPr lang="en-US" sz="1300" dirty="0"/>
-          </a:p>
-          <a:p>
-            <a:pPr indent="0" marL="0">
-              <a:spcAft>
-                <a:spcPts val="500"/>
-              </a:spcAft>
-              <a:buNone/>
-            </a:pPr>
-            <a:r>
-              <a:rPr lang="en-US" sz="1300" b="1" dirty="0">
-                <a:solidFill>
-                  <a:srgbClr val="0F2A5F"/>
-                </a:solidFill>
-              </a:rPr>
-              <a:t>manure</a:t>
-            </a:r>
-            <a:pPr indent="0" marL="0">
-              <a:spcAft>
-                <a:spcPts val="500"/>
-              </a:spcAft>
-              <a:buNone/>
-            </a:pPr>
-            <a:r>
-              <a:rPr lang="en-US" sz="1300" dirty="0">
-                <a:solidFill>
-                  <a:srgbClr val="141B26"/>
-                </a:solidFill>
-              </a:rPr>
-              <a:t>  animal waste used as a natural fertiliser</a:t>
-            </a:r>
-            <a:endParaRPr lang="en-US" sz="1300" dirty="0"/>
-          </a:p>
-          <a:p>
-            <a:pPr indent="0" marL="0">
-              <a:spcAft>
-                <a:spcPts val="500"/>
-              </a:spcAft>
-              <a:buNone/>
-            </a:pPr>
-            <a:r>
-              <a:rPr lang="en-US" sz="1300" b="1" dirty="0">
-                <a:solidFill>
-                  <a:srgbClr val="0F2A5F"/>
-                </a:solidFill>
-              </a:rPr>
-              <a:t>decomposer</a:t>
-            </a:r>
-            <a:pPr indent="0" marL="0">
-              <a:spcAft>
-                <a:spcPts val="500"/>
-              </a:spcAft>
-              <a:buNone/>
-            </a:pPr>
-            <a:r>
-              <a:rPr lang="en-US" sz="1300" dirty="0">
-                <a:solidFill>
-                  <a:srgbClr val="141B26"/>
-                </a:solidFill>
-              </a:rPr>
-              <a:t>  a microorganism that breaks down dead material and waste</a:t>
-            </a:r>
-            <a:endParaRPr lang="en-US" sz="1300" dirty="0"/>
-          </a:p>
-          <a:p>
-            <a:pPr indent="0" marL="0">
-              <a:spcAft>
-                <a:spcPts val="500"/>
-              </a:spcAft>
-              <a:buNone/>
-            </a:pPr>
-            <a:r>
-              <a:rPr lang="en-US" sz="1300" b="1" dirty="0">
-                <a:solidFill>
-                  <a:srgbClr val="0F2A5F"/>
-                </a:solidFill>
-              </a:rPr>
-              <a:t>pesticide</a:t>
-            </a:r>
-            <a:pPr indent="0" marL="0">
-              <a:spcAft>
-                <a:spcPts val="500"/>
-              </a:spcAft>
-              <a:buNone/>
-            </a:pPr>
-            <a:r>
-              <a:rPr lang="en-US" sz="1300" dirty="0">
-                <a:solidFill>
-                  <a:srgbClr val="141B26"/>
-                </a:solidFill>
-              </a:rPr>
-              <a:t>  a substance that kills pests (organisms that damage crops)</a:t>
-            </a:r>
-            <a:endParaRPr lang="en-US" sz="1300" dirty="0"/>
-          </a:p>
-          <a:p>
-            <a:pPr indent="0" marL="0">
-              <a:spcAft>
-                <a:spcPts val="500"/>
-              </a:spcAft>
-              <a:buNone/>
-            </a:pPr>
-            <a:r>
-              <a:rPr lang="en-US" sz="1300" b="1" dirty="0">
-                <a:solidFill>
-                  <a:srgbClr val="0F2A5F"/>
-                </a:solidFill>
-              </a:rPr>
-              <a:t>insecticide</a:t>
-            </a:r>
-            <a:pPr indent="0" marL="0">
-              <a:spcAft>
-                <a:spcPts val="500"/>
-              </a:spcAft>
-              <a:buNone/>
-            </a:pPr>
-            <a:r>
-              <a:rPr lang="en-US" sz="1300" dirty="0">
-                <a:solidFill>
-                  <a:srgbClr val="141B26"/>
-                </a:solidFill>
-              </a:rPr>
-              <a:t>  a pesticide that kills insects</a:t>
-            </a:r>
-            <a:endParaRPr lang="en-US" sz="1300" dirty="0"/>
-          </a:p>
-          <a:p>
-            <a:pPr indent="0" marL="0">
-              <a:spcAft>
-                <a:spcPts val="500"/>
-              </a:spcAft>
-              <a:buNone/>
-            </a:pPr>
-            <a:r>
-              <a:rPr lang="en-US" sz="1300" b="1" dirty="0">
-                <a:solidFill>
-                  <a:srgbClr val="0F2A5F"/>
-                </a:solidFill>
-              </a:rPr>
-              <a:t>fungicide</a:t>
-            </a:r>
-            <a:pPr indent="0" marL="0">
-              <a:spcAft>
-                <a:spcPts val="500"/>
-              </a:spcAft>
-              <a:buNone/>
-            </a:pPr>
-            <a:r>
-              <a:rPr lang="en-US" sz="1300" dirty="0">
-                <a:solidFill>
-                  <a:srgbClr val="141B26"/>
-                </a:solidFill>
-              </a:rPr>
-              <a:t>  a pesticide that kills fungi that cause plant diseases</a:t>
-            </a:r>
-            <a:endParaRPr lang="en-US" sz="1300" dirty="0"/>
-          </a:p>
-          <a:p>
-            <a:pPr indent="0" marL="0">
-              <a:spcAft>
-                <a:spcPts val="500"/>
-              </a:spcAft>
-              <a:buNone/>
-            </a:pPr>
-            <a:r>
-              <a:rPr lang="en-US" sz="1300" b="1" dirty="0">
-                <a:solidFill>
-                  <a:srgbClr val="0F2A5F"/>
-                </a:solidFill>
-              </a:rPr>
-              <a:t>herbicide</a:t>
-            </a:r>
-            <a:pPr indent="0" marL="0">
-              <a:spcAft>
-                <a:spcPts val="500"/>
-              </a:spcAft>
-              <a:buNone/>
-            </a:pPr>
-            <a:r>
-              <a:rPr lang="en-US" sz="1300" dirty="0">
-                <a:solidFill>
-                  <a:srgbClr val="141B26"/>
-                </a:solidFill>
-              </a:rPr>
-              <a:t>  a pesticide that kills weeds</a:t>
-            </a:r>
-            <a:endParaRPr lang="en-US" sz="1300" dirty="0"/>
-          </a:p>
-          <a:p>
-            <a:pPr indent="0" marL="0">
-              <a:spcAft>
-                <a:spcPts val="500"/>
-              </a:spcAft>
-              <a:buNone/>
-            </a:pPr>
-            <a:r>
-              <a:rPr lang="en-US" sz="1300" b="1" dirty="0">
-                <a:solidFill>
-                  <a:srgbClr val="0F2A5F"/>
-                </a:solidFill>
-              </a:rPr>
-              <a:t>weed</a:t>
-            </a:r>
-            <a:pPr indent="0" marL="0">
-              <a:spcAft>
-                <a:spcPts val="500"/>
-              </a:spcAft>
-              <a:buNone/>
-            </a:pPr>
-            <a:r>
-              <a:rPr lang="en-US" sz="1300" dirty="0">
-                <a:solidFill>
-                  <a:srgbClr val="141B26"/>
-                </a:solidFill>
-              </a:rPr>
-              <a:t>  a plant growing where it is not wanted, competing with the crop</a:t>
-            </a:r>
-            <a:endParaRPr lang="en-US" sz="1300" dirty="0"/>
-          </a:p>
-          <a:p>
-            <a:pPr indent="0" marL="0">
-              <a:spcAft>
-                <a:spcPts val="500"/>
-              </a:spcAft>
-              <a:buNone/>
-            </a:pPr>
-            <a:r>
-              <a:rPr lang="en-US" sz="1300" b="1" dirty="0">
-                <a:solidFill>
-                  <a:srgbClr val="0F2A5F"/>
-                </a:solidFill>
-              </a:rPr>
-              <a:t>variety</a:t>
-            </a:r>
-            <a:pPr indent="0" marL="0">
-              <a:spcAft>
-                <a:spcPts val="500"/>
-              </a:spcAft>
-              <a:buNone/>
-            </a:pPr>
-            <a:r>
-              <a:rPr lang="en-US" sz="1300" dirty="0">
-                <a:solidFill>
-                  <a:srgbClr val="141B26"/>
-                </a:solidFill>
-              </a:rPr>
-              <a:t>  a group of plants bred to have certain characteristics</a:t>
-            </a:r>
-            <a:endParaRPr lang="en-US" sz="1300" dirty="0"/>
-          </a:p>
-          <a:p>
-            <a:pPr indent="0" marL="0">
-              <a:spcAft>
-                <a:spcPts val="500"/>
-              </a:spcAft>
-              <a:buNone/>
-            </a:pPr>
-            <a:r>
-              <a:rPr lang="en-US" sz="1300" b="1" dirty="0">
-                <a:solidFill>
-                  <a:srgbClr val="0F2A5F"/>
-                </a:solidFill>
-              </a:rPr>
-              <a:t>selective breeding</a:t>
-            </a:r>
-            <a:pPr indent="0" marL="0">
-              <a:spcAft>
-                <a:spcPts val="500"/>
-              </a:spcAft>
-              <a:buNone/>
-            </a:pPr>
-            <a:r>
-              <a:rPr lang="en-US" sz="1300" dirty="0">
-                <a:solidFill>
-                  <a:srgbClr val="141B26"/>
-                </a:solidFill>
-              </a:rPr>
-              <a:t>  breeding only from the plants with the wanted characteristics, generation after generation</a:t>
-            </a:r>
-            <a:endParaRPr lang="en-US" sz="1300" dirty="0"/>
+              <a:buNone/>
+            </a:pPr>
+            <a:r>
+              <a:rPr lang="en-US" sz="1400" i="1" dirty="0">
+                <a:solidFill>
+                  <a:srgbClr val="5B6574"/>
+                </a:solidFill>
+              </a:rPr>
+              <a:t>Meanings are in the key words box on your worksheet.</a:t>
+            </a:r>
+            <a:endParaRPr lang="en-US" sz="1400" dirty="0"/>
           </a:p>
         </p:txBody>
       </p:sp>
@@ -6970,32 +6869,30 @@
         <p:spPr>
           <a:xfrm>
             <a:off x="548640" y="1371600"/>
-            <a:ext cx="5394960" cy="2377440"/>
-          </a:xfrm>
-          <a:prstGeom prst="rect">
-            <a:avLst/>
-          </a:prstGeom>
-          <a:noFill/>
-          <a:ln/>
-        </p:spPr>
-        <p:txBody>
-          <a:bodyPr wrap="square" lIns="0" tIns="0" rIns="0" bIns="0" rtlCol="0" anchor="t">
-            <a:normAutofit/>
-          </a:bodyPr>
+            <a:ext cx="5394960" cy="2651760"/>
+          </a:xfrm>
+          <a:prstGeom prst="rect">
+            <a:avLst/>
+          </a:prstGeom>
+          <a:noFill/>
+          <a:ln/>
+        </p:spPr>
+        <p:txBody>
+          <a:bodyPr wrap="square" lIns="0" tIns="0" rIns="0" bIns="0" rtlCol="0" anchor="t"/>
           <a:lstStyle/>
           <a:p>
             <a:pPr indent="0" marL="0">
               <a:buNone/>
             </a:pPr>
             <a:r>
-              <a:rPr lang="en-US" sz="2800" b="1" dirty="0">
+              <a:rPr lang="en-US" sz="3000" b="1" dirty="0">
                 <a:solidFill>
                   <a:srgbClr val="0F2A5F"/>
                 </a:solidFill>
               </a:rPr>
               <a:t>Farms in the UK today produce 35% more food from each square metre of land than they did in 1973. How?</a:t>
             </a:r>
-            <a:endParaRPr lang="en-US" sz="2800" dirty="0"/>
+            <a:endParaRPr lang="en-US" sz="3000" dirty="0"/>
           </a:p>
         </p:txBody>
       </p:sp>
@@ -7007,19 +6904,17 @@
         </p:nvSpPr>
         <p:spPr>
           <a:xfrm>
-            <a:off x="548640" y="3794760"/>
-            <a:ext cx="5394960" cy="2103120"/>
-          </a:xfrm>
-          <a:prstGeom prst="rect">
-            <a:avLst/>
-          </a:prstGeom>
-          <a:noFill/>
-          <a:ln/>
-        </p:spPr>
-        <p:txBody>
-          <a:bodyPr wrap="square" lIns="0" tIns="0" rIns="0" bIns="0" rtlCol="0" anchor="t">
-            <a:normAutofit/>
-          </a:bodyPr>
+            <a:off x="548640" y="4114800"/>
+            <a:ext cx="5394960" cy="1828800"/>
+          </a:xfrm>
+          <a:prstGeom prst="rect">
+            <a:avLst/>
+          </a:prstGeom>
+          <a:noFill/>
+          <a:ln/>
+        </p:spPr>
+        <p:txBody>
+          <a:bodyPr wrap="square" lIns="0" tIns="0" rIns="0" bIns="0" rtlCol="0" anchor="t"/>
           <a:lstStyle/>
           <a:p>
             <a:pPr indent="0" marL="0">
@@ -7029,14 +6924,14 @@
               <a:buNone/>
             </a:pPr>
             <a:r>
-              <a:rPr lang="en-US" sz="1600" dirty="0">
+              <a:rPr lang="en-US" sz="2000" dirty="0">
                 <a:solidFill>
                   <a:srgbClr val="141B26"/>
                 </a:solidFill>
               </a:rPr>
               <a:t>Talk to a partner. Make a list of everything a farmer could change.</a:t>
             </a:r>
-            <a:endParaRPr lang="en-US" sz="1600" dirty="0"/>
+            <a:endParaRPr lang="en-US" sz="2000" dirty="0"/>
           </a:p>
         </p:txBody>
       </p:sp>
@@ -7073,7 +6968,7 @@
         <p:spPr>
           <a:xfrm>
             <a:off x="6309360" y="5197703"/>
-            <a:ext cx="5303520" cy="502920"/>
+            <a:ext cx="5303520" cy="548640"/>
           </a:xfrm>
           <a:prstGeom prst="rect">
             <a:avLst/>
@@ -7089,7 +6984,7 @@
               <a:buNone/>
             </a:pPr>
             <a:r>
-              <a:rPr lang="en-US" sz="1100" dirty="0">
+              <a:rPr lang="en-US" sz="1300" dirty="0">
                 <a:solidFill>
                   <a:srgbClr val="141B26"/>
                 </a:solidFill>
@@ -7099,21 +6994,21 @@
             <a:pPr algn="l" indent="0" marL="0">
               <a:buNone/>
             </a:pPr>
-            <a:endParaRPr lang="en-US" sz="1100" dirty="0"/>
+            <a:endParaRPr lang="en-US" sz="1300" dirty="0"/>
           </a:p>
           <a:p>
             <a:pPr algn="l" indent="0" marL="0">
               <a:buNone/>
             </a:pPr>
             <a:r>
-              <a:rPr lang="en-US" sz="800" dirty="0">
+              <a:rPr lang="en-US" sz="900" dirty="0">
                 <a:solidFill>
                   <a:srgbClr val="5B6574"/>
                 </a:solidFill>
               </a:rPr>
               <a:t>Image: Rab ., CC BY 2.0, via Wikimedia Commons</a:t>
             </a:r>
-            <a:endParaRPr lang="en-US" sz="1100" dirty="0"/>
+            <a:endParaRPr lang="en-US" sz="1300" dirty="0"/>
           </a:p>
         </p:txBody>
       </p:sp>
@@ -7296,8 +7191,8 @@
         </p:nvSpPr>
         <p:spPr>
           <a:xfrm>
-            <a:off x="548640" y="6053328"/>
-            <a:ext cx="9601200" cy="292608"/>
+            <a:off x="548640" y="6035040"/>
+            <a:ext cx="9601200" cy="310896"/>
           </a:xfrm>
           <a:prstGeom prst="rect">
             <a:avLst/>
@@ -7313,7 +7208,7 @@
               <a:buNone/>
             </a:pPr>
             <a:r>
-              <a:rPr lang="en-US" sz="1200" b="1" dirty="0">
+              <a:rPr lang="en-US" sz="1400" b="1" dirty="0">
                 <a:solidFill>
                   <a:srgbClr val="7B3A8E"/>
                 </a:solidFill>
@@ -7324,14 +7219,14 @@
               <a:buNone/>
             </a:pPr>
             <a:r>
-              <a:rPr lang="en-US" sz="1200" dirty="0">
+              <a:rPr lang="en-US" sz="1400" dirty="0">
                 <a:solidFill>
                   <a:srgbClr val="7B3A8E"/>
                 </a:solidFill>
               </a:rPr>
               <a:t>fertiliser   ·   manure   ·   decomposer</a:t>
             </a:r>
-            <a:endParaRPr lang="en-US" sz="1200" dirty="0"/>
+            <a:endParaRPr lang="en-US" sz="1400" dirty="0"/>
           </a:p>
         </p:txBody>
       </p:sp>
@@ -7353,99 +7248,97 @@
           <a:ln/>
         </p:spPr>
         <p:txBody>
-          <a:bodyPr wrap="square" lIns="0" tIns="0" rIns="0" bIns="0" rtlCol="0" anchor="t">
-            <a:normAutofit/>
-          </a:bodyPr>
-          <a:lstStyle/>
-          <a:p>
-            <a:pPr marL="228600" indent="-228600">
+          <a:bodyPr wrap="square" lIns="0" tIns="0" rIns="0" bIns="0" rtlCol="0" anchor="t"/>
+          <a:lstStyle/>
+          <a:p>
+            <a:pPr marL="304800" indent="-304800">
               <a:spcAft>
-                <a:spcPts val="600"/>
+                <a:spcPts val="800"/>
               </a:spcAft>
               <a:buSzPct val="100000"/>
               <a:buChar char="•"/>
             </a:pPr>
             <a:r>
-              <a:rPr lang="en-US" sz="1700" dirty="0">
+              <a:rPr lang="en-US" sz="1800" dirty="0">
                 <a:solidFill>
                   <a:srgbClr val="141B26"/>
                 </a:solidFill>
               </a:rPr>
               <a:t>Fertilisers contain mineral salts that help plants grow: nitrates, phosphates and potassium.</a:t>
             </a:r>
-            <a:endParaRPr lang="en-US" sz="1700" dirty="0"/>
-          </a:p>
-          <a:p>
-            <a:pPr marL="228600" indent="-228600">
+            <a:endParaRPr lang="en-US" sz="1800" dirty="0"/>
+          </a:p>
+          <a:p>
+            <a:pPr marL="304800" indent="-304800">
               <a:spcAft>
-                <a:spcPts val="600"/>
+                <a:spcPts val="800"/>
               </a:spcAft>
               <a:buSzPct val="100000"/>
               <a:buChar char="•"/>
             </a:pPr>
             <a:r>
-              <a:rPr lang="en-US" sz="1700" dirty="0">
+              <a:rPr lang="en-US" sz="1800" dirty="0">
                 <a:solidFill>
                   <a:srgbClr val="141B26"/>
                 </a:solidFill>
               </a:rPr>
               <a:t>Artificial fertilisers are cheap, dissolve in water and act fast.</a:t>
             </a:r>
-            <a:endParaRPr lang="en-US" sz="1700" dirty="0"/>
-          </a:p>
-          <a:p>
-            <a:pPr marL="228600" indent="-228600">
+            <a:endParaRPr lang="en-US" sz="1800" dirty="0"/>
+          </a:p>
+          <a:p>
+            <a:pPr marL="304800" indent="-304800">
               <a:spcAft>
-                <a:spcPts val="600"/>
+                <a:spcPts val="800"/>
               </a:spcAft>
               <a:buSzPct val="100000"/>
               <a:buChar char="•"/>
             </a:pPr>
             <a:r>
-              <a:rPr lang="en-US" sz="1700" dirty="0">
+              <a:rPr lang="en-US" sz="1800" dirty="0">
                 <a:solidFill>
                   <a:srgbClr val="141B26"/>
                 </a:solidFill>
               </a:rPr>
               <a:t>Manure (animal waste) is natural: decomposers break it down and release the mineral salts slowly.</a:t>
             </a:r>
-            <a:endParaRPr lang="en-US" sz="1700" dirty="0"/>
-          </a:p>
-          <a:p>
-            <a:pPr marL="228600" indent="-228600">
+            <a:endParaRPr lang="en-US" sz="1800" dirty="0"/>
+          </a:p>
+          <a:p>
+            <a:pPr marL="304800" indent="-304800">
               <a:spcAft>
-                <a:spcPts val="600"/>
+                <a:spcPts val="800"/>
               </a:spcAft>
               <a:buSzPct val="100000"/>
               <a:buChar char="•"/>
             </a:pPr>
             <a:r>
-              <a:rPr lang="en-US" sz="1700" dirty="0">
+              <a:rPr lang="en-US" sz="1800" dirty="0">
                 <a:solidFill>
                   <a:srgbClr val="141B26"/>
                 </a:solidFill>
               </a:rPr>
               <a:t>Greenhouses protect crops from changes in abiotic factors such as temperature, wind and rain.</a:t>
             </a:r>
-            <a:endParaRPr lang="en-US" sz="1700" dirty="0"/>
-          </a:p>
-          <a:p>
-            <a:pPr marL="228600" indent="-228600">
+            <a:endParaRPr lang="en-US" sz="1800" dirty="0"/>
+          </a:p>
+          <a:p>
+            <a:pPr marL="304800" indent="-304800">
               <a:spcAft>
-                <a:spcPts val="600"/>
+                <a:spcPts val="800"/>
               </a:spcAft>
               <a:buSzPct val="100000"/>
               <a:buChar char="•"/>
             </a:pPr>
             <a:r>
-              <a:rPr lang="en-US" sz="1700" dirty="0">
+              <a:rPr lang="en-US" sz="1800" dirty="0">
                 <a:solidFill>
                   <a:srgbClr val="141B26"/>
                 </a:solidFill>
               </a:rPr>
               <a:t>Machines plant and harvest faster than people; forests and hedges are cleared to make room for them.</a:t>
             </a:r>
-            <a:endParaRPr lang="en-US" sz="1700" dirty="0"/>
+            <a:endParaRPr lang="en-US" sz="1800" dirty="0"/>
           </a:p>
         </p:txBody>
       </p:sp>
@@ -7482,7 +7375,7 @@
         <p:spPr>
           <a:xfrm>
             <a:off x="6583680" y="4831080"/>
-            <a:ext cx="5029200" cy="502920"/>
+            <a:ext cx="5029200" cy="548640"/>
           </a:xfrm>
           <a:prstGeom prst="rect">
             <a:avLst/>
@@ -7498,7 +7391,7 @@
               <a:buNone/>
             </a:pPr>
             <a:r>
-              <a:rPr lang="en-US" sz="1100" dirty="0">
+              <a:rPr lang="en-US" sz="1300" dirty="0">
                 <a:solidFill>
                   <a:srgbClr val="141B26"/>
                 </a:solidFill>
@@ -7508,21 +7401,21 @@
             <a:pPr algn="l" indent="0" marL="0">
               <a:buNone/>
             </a:pPr>
-            <a:endParaRPr lang="en-US" sz="1100" dirty="0"/>
+            <a:endParaRPr lang="en-US" sz="1300" dirty="0"/>
           </a:p>
           <a:p>
             <a:pPr algn="l" indent="0" marL="0">
               <a:buNone/>
             </a:pPr>
             <a:r>
-              <a:rPr lang="en-US" sz="800" dirty="0">
+              <a:rPr lang="en-US" sz="900" dirty="0">
                 <a:solidFill>
                   <a:srgbClr val="5B6574"/>
                 </a:solidFill>
               </a:rPr>
               <a:t>Image: Ian Livesey, CC0, via Wikimedia Commons</a:t>
             </a:r>
-            <a:endParaRPr lang="en-US" sz="1100" dirty="0"/>
+            <a:endParaRPr lang="en-US" sz="1300" dirty="0"/>
           </a:p>
         </p:txBody>
       </p:sp>
@@ -7569,16 +7462,14 @@
           <a:ln/>
         </p:spPr>
         <p:txBody>
-          <a:bodyPr wrap="square" lIns="0" tIns="0" rIns="0" bIns="0" rtlCol="0" anchor="ctr">
-            <a:normAutofit/>
-          </a:bodyPr>
+          <a:bodyPr wrap="square" lIns="0" tIns="0" rIns="0" bIns="0" rtlCol="0" anchor="ctr"/>
           <a:lstStyle/>
           <a:p>
             <a:pPr indent="0" marL="0">
               <a:buNone/>
             </a:pPr>
             <a:r>
-              <a:rPr lang="en-US" sz="1400" b="1" dirty="0">
+              <a:rPr lang="en-US" sz="1700" b="1" dirty="0">
                 <a:solidFill>
                   <a:srgbClr val="7B3A8E"/>
                 </a:solidFill>
@@ -7589,14 +7480,14 @@
               <a:buNone/>
             </a:pPr>
             <a:r>
-              <a:rPr lang="en-US" sz="1400" dirty="0">
+              <a:rPr lang="en-US" sz="1700" dirty="0">
                 <a:solidFill>
                   <a:srgbClr val="141B26"/>
                 </a:solidFill>
               </a:rPr>
               <a:t>Fertiliser supplies the mineral salts a plant builds with; the plant still makes its own food.</a:t>
             </a:r>
-            <a:endParaRPr lang="en-US" sz="1400" dirty="0"/>
+            <a:endParaRPr lang="en-US" sz="1700" dirty="0"/>
           </a:p>
         </p:txBody>
       </p:sp>
@@ -7779,8 +7670,8 @@
         </p:nvSpPr>
         <p:spPr>
           <a:xfrm>
-            <a:off x="548640" y="6053328"/>
-            <a:ext cx="9601200" cy="292608"/>
+            <a:off x="548640" y="6035040"/>
+            <a:ext cx="9601200" cy="310896"/>
           </a:xfrm>
           <a:prstGeom prst="rect">
             <a:avLst/>
@@ -7796,7 +7687,7 @@
               <a:buNone/>
             </a:pPr>
             <a:r>
-              <a:rPr lang="en-US" sz="1200" b="1" dirty="0">
+              <a:rPr lang="en-US" sz="1400" b="1" dirty="0">
                 <a:solidFill>
                   <a:srgbClr val="7B3A8E"/>
                 </a:solidFill>
@@ -7807,14 +7698,14 @@
               <a:buNone/>
             </a:pPr>
             <a:r>
-              <a:rPr lang="en-US" sz="1200" dirty="0">
+              <a:rPr lang="en-US" sz="1400" dirty="0">
                 <a:solidFill>
                   <a:srgbClr val="7B3A8E"/>
                 </a:solidFill>
               </a:rPr>
               <a:t>yield   ·   fertiliser</a:t>
             </a:r>
-            <a:endParaRPr lang="en-US" sz="1200" dirty="0"/>
+            <a:endParaRPr lang="en-US" sz="1400" dirty="0"/>
           </a:p>
         </p:txBody>
       </p:sp>
@@ -7852,81 +7743,79 @@
           <a:ln/>
         </p:spPr>
         <p:txBody>
-          <a:bodyPr wrap="square" lIns="0" tIns="0" rIns="0" bIns="0" rtlCol="0" anchor="t">
-            <a:normAutofit/>
-          </a:bodyPr>
-          <a:lstStyle/>
-          <a:p>
-            <a:pPr marL="228600" indent="-228600">
+          <a:bodyPr wrap="square" lIns="0" tIns="0" rIns="0" bIns="0" rtlCol="0" anchor="t"/>
+          <a:lstStyle/>
+          <a:p>
+            <a:pPr marL="304800" indent="-304800">
               <a:spcAft>
-                <a:spcPts val="600"/>
+                <a:spcPts val="800"/>
               </a:spcAft>
               <a:buSzPct val="100000"/>
               <a:buChar char="•"/>
             </a:pPr>
             <a:r>
-              <a:rPr lang="en-US" sz="1500" dirty="0">
+              <a:rPr lang="en-US" sz="1800" dirty="0">
                 <a:solidFill>
                   <a:srgbClr val="141B26"/>
                 </a:solidFill>
               </a:rPr>
               <a:t>Four groups each grew 20 bean plants in identical pots, one plant per pot.</a:t>
             </a:r>
-            <a:endParaRPr lang="en-US" sz="1500" dirty="0"/>
-          </a:p>
-          <a:p>
-            <a:pPr marL="228600" indent="-228600">
+            <a:endParaRPr lang="en-US" sz="1800" dirty="0"/>
+          </a:p>
+          <a:p>
+            <a:pPr marL="304800" indent="-304800">
               <a:spcAft>
-                <a:spcPts val="600"/>
+                <a:spcPts val="800"/>
               </a:spcAft>
               <a:buSzPct val="100000"/>
               <a:buChar char="•"/>
             </a:pPr>
             <a:r>
-              <a:rPr lang="en-US" sz="1500" dirty="0">
+              <a:rPr lang="en-US" sz="1800" dirty="0">
                 <a:solidFill>
                   <a:srgbClr val="141B26"/>
                 </a:solidFill>
               </a:rPr>
               <a:t>Each group added a different number of drops of the same liquid fertiliser.</a:t>
             </a:r>
-            <a:endParaRPr lang="en-US" sz="1500" dirty="0"/>
-          </a:p>
-          <a:p>
-            <a:pPr marL="228600" indent="-228600">
+            <a:endParaRPr lang="en-US" sz="1800" dirty="0"/>
+          </a:p>
+          <a:p>
+            <a:pPr marL="304800" indent="-304800">
               <a:spcAft>
-                <a:spcPts val="600"/>
+                <a:spcPts val="800"/>
               </a:spcAft>
               <a:buSzPct val="100000"/>
               <a:buChar char="•"/>
             </a:pPr>
             <a:r>
-              <a:rPr lang="en-US" sz="1500" dirty="0">
+              <a:rPr lang="en-US" sz="1800" dirty="0">
                 <a:solidFill>
                   <a:srgbClr val="141B26"/>
                 </a:solidFill>
               </a:rPr>
               <a:t>Describe the trend from 2 to 6 drops.</a:t>
             </a:r>
-            <a:endParaRPr lang="en-US" sz="1500" dirty="0"/>
-          </a:p>
-          <a:p>
-            <a:pPr marL="228600" indent="-228600">
+            <a:endParaRPr lang="en-US" sz="1800" dirty="0"/>
+          </a:p>
+          <a:p>
+            <a:pPr marL="304800" indent="-304800">
               <a:spcAft>
-                <a:spcPts val="600"/>
+                <a:spcPts val="800"/>
               </a:spcAft>
               <a:buSzPct val="100000"/>
               <a:buChar char="•"/>
             </a:pPr>
             <a:r>
-              <a:rPr lang="en-US" sz="1500" dirty="0">
+              <a:rPr lang="en-US" sz="1800" dirty="0">
                 <a:solidFill>
                   <a:srgbClr val="141B26"/>
                 </a:solidFill>
               </a:rPr>
               <a:t>What happened with 8 drops?</a:t>
             </a:r>
-            <a:endParaRPr lang="en-US" sz="1500" dirty="0"/>
+            <a:endParaRPr lang="en-US" sz="1800" dirty="0"/>
           </a:p>
         </p:txBody>
       </p:sp>
@@ -7973,16 +7862,14 @@
           <a:ln/>
         </p:spPr>
         <p:txBody>
-          <a:bodyPr wrap="square" lIns="0" tIns="0" rIns="0" bIns="0" rtlCol="0" anchor="ctr">
-            <a:normAutofit/>
-          </a:bodyPr>
+          <a:bodyPr wrap="square" lIns="0" tIns="0" rIns="0" bIns="0" rtlCol="0" anchor="ctr"/>
           <a:lstStyle/>
           <a:p>
             <a:pPr indent="0" marL="0">
               <a:buNone/>
             </a:pPr>
             <a:r>
-              <a:rPr lang="en-US" sz="1400" b="1" dirty="0">
+              <a:rPr lang="en-US" sz="1700" b="1" dirty="0">
                 <a:solidFill>
                   <a:srgbClr val="7B3A8E"/>
                 </a:solidFill>
@@ -7993,14 +7880,14 @@
               <a:buNone/>
             </a:pPr>
             <a:r>
-              <a:rPr lang="en-US" sz="1400" dirty="0">
+              <a:rPr lang="en-US" sz="1700" dirty="0">
                 <a:solidFill>
                   <a:srgbClr val="141B26"/>
                 </a:solidFill>
               </a:rPr>
               <a:t>More fertiliser helps up to a point; too much can harm the plants. There is an optimum amount.</a:t>
             </a:r>
-            <a:endParaRPr lang="en-US" sz="1400" dirty="0"/>
+            <a:endParaRPr lang="en-US" sz="1700" dirty="0"/>
           </a:p>
         </p:txBody>
       </p:sp>
@@ -8183,8 +8070,8 @@
         </p:nvSpPr>
         <p:spPr>
           <a:xfrm>
-            <a:off x="548640" y="6053328"/>
-            <a:ext cx="9601200" cy="292608"/>
+            <a:off x="548640" y="6035040"/>
+            <a:ext cx="9601200" cy="310896"/>
           </a:xfrm>
           <a:prstGeom prst="rect">
             <a:avLst/>
@@ -8200,7 +8087,7 @@
               <a:buNone/>
             </a:pPr>
             <a:r>
-              <a:rPr lang="en-US" sz="1200" b="1" dirty="0">
+              <a:rPr lang="en-US" sz="1400" b="1" dirty="0">
                 <a:solidFill>
                   <a:srgbClr val="7B3A8E"/>
                 </a:solidFill>
@@ -8211,14 +8098,14 @@
               <a:buNone/>
             </a:pPr>
             <a:r>
-              <a:rPr lang="en-US" sz="1200" dirty="0">
+              <a:rPr lang="en-US" sz="1400" dirty="0">
                 <a:solidFill>
                   <a:srgbClr val="7B3A8E"/>
                 </a:solidFill>
               </a:rPr>
               <a:t>pesticide   ·   insecticide   ·   fungicide   ·   herbicide   ·   weed</a:t>
             </a:r>
-            <a:endParaRPr lang="en-US" sz="1200" dirty="0"/>
+            <a:endParaRPr lang="en-US" sz="1400" dirty="0"/>
           </a:p>
         </p:txBody>
       </p:sp>
@@ -8240,99 +8127,97 @@
           <a:ln/>
         </p:spPr>
         <p:txBody>
-          <a:bodyPr wrap="square" lIns="0" tIns="0" rIns="0" bIns="0" rtlCol="0" anchor="t">
-            <a:normAutofit/>
-          </a:bodyPr>
-          <a:lstStyle/>
-          <a:p>
-            <a:pPr marL="228600" indent="-228600">
+          <a:bodyPr wrap="square" lIns="0" tIns="0" rIns="0" bIns="0" rtlCol="0" anchor="t"/>
+          <a:lstStyle/>
+          <a:p>
+            <a:pPr marL="304800" indent="-304800">
               <a:spcAft>
-                <a:spcPts val="600"/>
+                <a:spcPts val="800"/>
               </a:spcAft>
               <a:buSzPct val="100000"/>
               <a:buChar char="•"/>
             </a:pPr>
             <a:r>
-              <a:rPr lang="en-US" sz="1700" dirty="0">
+              <a:rPr lang="en-US" sz="1900" dirty="0">
                 <a:solidFill>
                   <a:srgbClr val="141B26"/>
                 </a:solidFill>
               </a:rPr>
               <a:t>Pests are organisms that damage crops. Pesticides kill them.</a:t>
             </a:r>
-            <a:endParaRPr lang="en-US" sz="1700" dirty="0"/>
-          </a:p>
-          <a:p>
-            <a:pPr marL="228600" indent="-228600">
+            <a:endParaRPr lang="en-US" sz="1900" dirty="0"/>
+          </a:p>
+          <a:p>
+            <a:pPr marL="304800" indent="-304800">
               <a:spcAft>
-                <a:spcPts val="600"/>
+                <a:spcPts val="800"/>
               </a:spcAft>
               <a:buSzPct val="100000"/>
               <a:buChar char="•"/>
             </a:pPr>
             <a:r>
-              <a:rPr lang="en-US" sz="1700" dirty="0">
+              <a:rPr lang="en-US" sz="1900" dirty="0">
                 <a:solidFill>
                   <a:srgbClr val="141B26"/>
                 </a:solidFill>
               </a:rPr>
               <a:t>Insecticides kill insect pests such as aphids.</a:t>
             </a:r>
-            <a:endParaRPr lang="en-US" sz="1700" dirty="0"/>
-          </a:p>
-          <a:p>
-            <a:pPr marL="228600" indent="-228600">
+            <a:endParaRPr lang="en-US" sz="1900" dirty="0"/>
+          </a:p>
+          <a:p>
+            <a:pPr marL="304800" indent="-304800">
               <a:spcAft>
-                <a:spcPts val="600"/>
+                <a:spcPts val="800"/>
               </a:spcAft>
               <a:buSzPct val="100000"/>
               <a:buChar char="•"/>
             </a:pPr>
             <a:r>
-              <a:rPr lang="en-US" sz="1700" dirty="0">
+              <a:rPr lang="en-US" sz="1900" dirty="0">
                 <a:solidFill>
                   <a:srgbClr val="141B26"/>
                 </a:solidFill>
               </a:rPr>
               <a:t>Fungicides kill fungi that cause plant diseases such as rust.</a:t>
             </a:r>
-            <a:endParaRPr lang="en-US" sz="1700" dirty="0"/>
-          </a:p>
-          <a:p>
-            <a:pPr marL="228600" indent="-228600">
+            <a:endParaRPr lang="en-US" sz="1900" dirty="0"/>
+          </a:p>
+          <a:p>
+            <a:pPr marL="304800" indent="-304800">
               <a:spcAft>
-                <a:spcPts val="600"/>
+                <a:spcPts val="800"/>
               </a:spcAft>
               <a:buSzPct val="100000"/>
               <a:buChar char="•"/>
             </a:pPr>
             <a:r>
-              <a:rPr lang="en-US" sz="1700" dirty="0">
+              <a:rPr lang="en-US" sz="1900" dirty="0">
                 <a:solidFill>
                   <a:srgbClr val="141B26"/>
                 </a:solidFill>
               </a:rPr>
               <a:t>Herbicides (weedkillers) kill weeds, which compete with the crop for water, light and mineral salts.</a:t>
             </a:r>
-            <a:endParaRPr lang="en-US" sz="1700" dirty="0"/>
-          </a:p>
-          <a:p>
-            <a:pPr marL="228600" indent="-228600">
+            <a:endParaRPr lang="en-US" sz="1900" dirty="0"/>
+          </a:p>
+          <a:p>
+            <a:pPr marL="304800" indent="-304800">
               <a:spcAft>
-                <a:spcPts val="600"/>
+                <a:spcPts val="800"/>
               </a:spcAft>
               <a:buSzPct val="100000"/>
               <a:buChar char="•"/>
             </a:pPr>
             <a:r>
-              <a:rPr lang="en-US" sz="1700" dirty="0">
+              <a:rPr lang="en-US" sz="1900" dirty="0">
                 <a:solidFill>
                   <a:srgbClr val="141B26"/>
                 </a:solidFill>
               </a:rPr>
               <a:t>Selective herbicides kill broad-leaved weeds but not narrow-leaved crops such as wheat.</a:t>
             </a:r>
-            <a:endParaRPr lang="en-US" sz="1700" dirty="0"/>
+            <a:endParaRPr lang="en-US" sz="1900" dirty="0"/>
           </a:p>
         </p:txBody>
       </p:sp>
@@ -8369,7 +8254,7 @@
         <p:spPr>
           <a:xfrm>
             <a:off x="6583680" y="4983480"/>
-            <a:ext cx="5029200" cy="502920"/>
+            <a:ext cx="5029200" cy="548640"/>
           </a:xfrm>
           <a:prstGeom prst="rect">
             <a:avLst/>
@@ -8385,7 +8270,7 @@
               <a:buNone/>
             </a:pPr>
             <a:r>
-              <a:rPr lang="en-US" sz="1100" dirty="0">
+              <a:rPr lang="en-US" sz="1300" dirty="0">
                 <a:solidFill>
                   <a:srgbClr val="141B26"/>
                 </a:solidFill>
@@ -8395,21 +8280,21 @@
             <a:pPr algn="l" indent="0" marL="0">
               <a:buNone/>
             </a:pPr>
-            <a:endParaRPr lang="en-US" sz="1100" dirty="0"/>
+            <a:endParaRPr lang="en-US" sz="1300" dirty="0"/>
           </a:p>
           <a:p>
             <a:pPr algn="l" indent="0" marL="0">
               <a:buNone/>
             </a:pPr>
             <a:r>
-              <a:rPr lang="en-US" sz="800" dirty="0">
+              <a:rPr lang="en-US" sz="900" dirty="0">
                 <a:solidFill>
                   <a:srgbClr val="5B6574"/>
                 </a:solidFill>
               </a:rPr>
               <a:t>Image: Ivan Radic, CC BY 2.0, via Wikimedia Commons</a:t>
             </a:r>
-            <a:endParaRPr lang="en-US" sz="1100" dirty="0"/>
+            <a:endParaRPr lang="en-US" sz="1300" dirty="0"/>
           </a:p>
         </p:txBody>
       </p:sp>
@@ -8456,16 +8341,14 @@
           <a:ln/>
         </p:spPr>
         <p:txBody>
-          <a:bodyPr wrap="square" lIns="0" tIns="0" rIns="0" bIns="0" rtlCol="0" anchor="ctr">
-            <a:normAutofit/>
-          </a:bodyPr>
+          <a:bodyPr wrap="square" lIns="0" tIns="0" rIns="0" bIns="0" rtlCol="0" anchor="ctr"/>
           <a:lstStyle/>
           <a:p>
             <a:pPr indent="0" marL="0">
               <a:buNone/>
             </a:pPr>
             <a:r>
-              <a:rPr lang="en-US" sz="1400" b="1" dirty="0">
+              <a:rPr lang="en-US" sz="1700" b="1" dirty="0">
                 <a:solidFill>
                   <a:srgbClr val="7B3A8E"/>
                 </a:solidFill>
@@ -8476,14 +8359,14 @@
               <a:buNone/>
             </a:pPr>
             <a:r>
-              <a:rPr lang="en-US" sz="1400" dirty="0">
+              <a:rPr lang="en-US" sz="1700" dirty="0">
                 <a:solidFill>
                   <a:srgbClr val="141B26"/>
                 </a:solidFill>
               </a:rPr>
               <a:t>-cide means 'kills': insecticide, fungicide and herbicide are all pesticides.</a:t>
             </a:r>
-            <a:endParaRPr lang="en-US" sz="1400" dirty="0"/>
+            <a:endParaRPr lang="en-US" sz="1700" dirty="0"/>
           </a:p>
         </p:txBody>
       </p:sp>
@@ -8666,8 +8549,8 @@
         </p:nvSpPr>
         <p:spPr>
           <a:xfrm>
-            <a:off x="548640" y="6053328"/>
-            <a:ext cx="9601200" cy="292608"/>
+            <a:off x="548640" y="6035040"/>
+            <a:ext cx="9601200" cy="310896"/>
           </a:xfrm>
           <a:prstGeom prst="rect">
             <a:avLst/>
@@ -8683,7 +8566,7 @@
               <a:buNone/>
             </a:pPr>
             <a:r>
-              <a:rPr lang="en-US" sz="1200" b="1" dirty="0">
+              <a:rPr lang="en-US" sz="1400" b="1" dirty="0">
                 <a:solidFill>
                   <a:srgbClr val="7B3A8E"/>
                 </a:solidFill>
@@ -8694,14 +8577,14 @@
               <a:buNone/>
             </a:pPr>
             <a:r>
-              <a:rPr lang="en-US" sz="1200" dirty="0">
+              <a:rPr lang="en-US" sz="1400" dirty="0">
                 <a:solidFill>
                   <a:srgbClr val="7B3A8E"/>
                 </a:solidFill>
               </a:rPr>
               <a:t>variety   ·   selective breeding</a:t>
             </a:r>
-            <a:endParaRPr lang="en-US" sz="1200" dirty="0"/>
+            <a:endParaRPr lang="en-US" sz="1400" dirty="0"/>
           </a:p>
         </p:txBody>
       </p:sp>
@@ -8730,14 +8613,14 @@
               <a:buNone/>
             </a:pPr>
             <a:r>
-              <a:rPr lang="en-US" sz="1600" dirty="0">
+              <a:rPr lang="en-US" sz="1500" dirty="0">
                 <a:solidFill>
                   <a:srgbClr val="141B26"/>
                 </a:solidFill>
               </a:rPr>
               <a:t>A variety is a group of plants bred to have certain characteristics, such as resistance to rust disease or short stems that do not blow over.</a:t>
             </a:r>
-            <a:endParaRPr lang="en-US" sz="1600" dirty="0"/>
+            <a:endParaRPr lang="en-US" sz="1500" dirty="0"/>
           </a:p>
         </p:txBody>
       </p:sp>
@@ -8808,16 +8691,14 @@
           <a:ln/>
         </p:spPr>
         <p:txBody>
-          <a:bodyPr wrap="square" lIns="0" tIns="0" rIns="0" bIns="0" rtlCol="0" anchor="ctr">
-            <a:normAutofit/>
-          </a:bodyPr>
+          <a:bodyPr wrap="square" lIns="0" tIns="0" rIns="0" bIns="0" rtlCol="0" anchor="ctr"/>
           <a:lstStyle/>
           <a:p>
             <a:pPr indent="0" marL="0">
               <a:buNone/>
             </a:pPr>
             <a:r>
-              <a:rPr lang="en-US" sz="1400" b="1" dirty="0">
+              <a:rPr lang="en-US" sz="1700" b="1" dirty="0">
                 <a:solidFill>
                   <a:srgbClr val="7B3A8E"/>
                 </a:solidFill>
@@ -8828,14 +8709,14 @@
               <a:buNone/>
             </a:pPr>
             <a:r>
-              <a:rPr lang="en-US" sz="1400" dirty="0">
+              <a:rPr lang="en-US" sz="1700" dirty="0">
                 <a:solidFill>
                   <a:srgbClr val="141B26"/>
                 </a:solidFill>
               </a:rPr>
               <a:t>Cross-breeding: two varieties bred together to combine their characteristics. Selective breeding: only the best plants are used to breed, generation after generation.</a:t>
             </a:r>
-            <a:endParaRPr lang="en-US" sz="1400" dirty="0"/>
+            <a:endParaRPr lang="en-US" sz="1700" dirty="0"/>
           </a:p>
         </p:txBody>
       </p:sp>
@@ -9018,8 +8899,8 @@
         </p:nvSpPr>
         <p:spPr>
           <a:xfrm>
-            <a:off x="548640" y="6053328"/>
-            <a:ext cx="9601200" cy="292608"/>
+            <a:off x="548640" y="6035040"/>
+            <a:ext cx="9601200" cy="310896"/>
           </a:xfrm>
           <a:prstGeom prst="rect">
             <a:avLst/>
@@ -9035,7 +8916,7 @@
               <a:buNone/>
             </a:pPr>
             <a:r>
-              <a:rPr lang="en-US" sz="1200" b="1" dirty="0">
+              <a:rPr lang="en-US" sz="1400" b="1" dirty="0">
                 <a:solidFill>
                   <a:srgbClr val="7B3A8E"/>
                 </a:solidFill>
@@ -9046,14 +8927,14 @@
               <a:buNone/>
             </a:pPr>
             <a:r>
-              <a:rPr lang="en-US" sz="1200" dirty="0">
+              <a:rPr lang="en-US" sz="1400" dirty="0">
                 <a:solidFill>
                   <a:srgbClr val="7B3A8E"/>
                 </a:solidFill>
               </a:rPr>
               <a:t>yield</a:t>
             </a:r>
-            <a:endParaRPr lang="en-US" sz="1200" dirty="0"/>
+            <a:endParaRPr lang="en-US" sz="1400" dirty="0"/>
           </a:p>
         </p:txBody>
       </p:sp>
@@ -9075,99 +8956,97 @@
           <a:ln/>
         </p:spPr>
         <p:txBody>
-          <a:bodyPr wrap="square" lIns="0" tIns="0" rIns="0" bIns="0" rtlCol="0" anchor="t">
-            <a:normAutofit/>
-          </a:bodyPr>
-          <a:lstStyle/>
-          <a:p>
-            <a:pPr marL="228600" indent="-228600">
+          <a:bodyPr wrap="square" lIns="0" tIns="0" rIns="0" bIns="0" rtlCol="0" anchor="t"/>
+          <a:lstStyle/>
+          <a:p>
+            <a:pPr marL="304800" indent="-304800">
               <a:spcAft>
-                <a:spcPts val="600"/>
+                <a:spcPts val="800"/>
               </a:spcAft>
               <a:buSzPct val="100000"/>
               <a:buChar char="•"/>
             </a:pPr>
             <a:r>
-              <a:rPr lang="en-US" sz="1700" dirty="0">
+              <a:rPr lang="en-US" sz="1800" dirty="0">
                 <a:solidFill>
                   <a:srgbClr val="141B26"/>
                 </a:solidFill>
               </a:rPr>
               <a:t>In low-income countries many families grow their own crops. More people in the family, or more pests, means less food for each person.</a:t>
             </a:r>
-            <a:endParaRPr lang="en-US" sz="1700" dirty="0"/>
-          </a:p>
-          <a:p>
-            <a:pPr marL="228600" indent="-228600">
+            <a:endParaRPr lang="en-US" sz="1800" dirty="0"/>
+          </a:p>
+          <a:p>
+            <a:pPr marL="304800" indent="-304800">
               <a:spcAft>
-                <a:spcPts val="600"/>
+                <a:spcPts val="800"/>
               </a:spcAft>
               <a:buSzPct val="100000"/>
               <a:buChar char="•"/>
             </a:pPr>
             <a:r>
-              <a:rPr lang="en-US" sz="1700" dirty="0">
+              <a:rPr lang="en-US" sz="1800" dirty="0">
                 <a:solidFill>
                   <a:srgbClr val="141B26"/>
                 </a:solidFill>
               </a:rPr>
               <a:t>Selective herbicides cost money, so some farmers weed by hand.</a:t>
             </a:r>
-            <a:endParaRPr lang="en-US" sz="1700" dirty="0"/>
-          </a:p>
-          <a:p>
-            <a:pPr marL="228600" indent="-228600">
+            <a:endParaRPr lang="en-US" sz="1800" dirty="0"/>
+          </a:p>
+          <a:p>
+            <a:pPr marL="304800" indent="-304800">
               <a:spcAft>
-                <a:spcPts val="600"/>
+                <a:spcPts val="800"/>
               </a:spcAft>
               <a:buSzPct val="100000"/>
               <a:buChar char="•"/>
             </a:pPr>
             <a:r>
-              <a:rPr lang="en-US" sz="1700" dirty="0">
+              <a:rPr lang="en-US" sz="1800" dirty="0">
                 <a:solidFill>
                   <a:srgbClr val="141B26"/>
                 </a:solidFill>
               </a:rPr>
               <a:t>Farming can also destroy the habitats of wild plants. Endemic species, found nowhere else, are most at risk.</a:t>
             </a:r>
-            <a:endParaRPr lang="en-US" sz="1700" dirty="0"/>
-          </a:p>
-          <a:p>
-            <a:pPr marL="228600" indent="-228600">
+            <a:endParaRPr lang="en-US" sz="1800" dirty="0"/>
+          </a:p>
+          <a:p>
+            <a:pPr marL="304800" indent="-304800">
               <a:spcAft>
-                <a:spcPts val="600"/>
+                <a:spcPts val="800"/>
               </a:spcAft>
               <a:buSzPct val="100000"/>
               <a:buChar char="•"/>
             </a:pPr>
             <a:r>
-              <a:rPr lang="en-US" sz="1700" dirty="0">
+              <a:rPr lang="en-US" sz="1800" dirty="0">
                 <a:solidFill>
                   <a:srgbClr val="141B26"/>
                 </a:solidFill>
               </a:rPr>
               <a:t>The IUCN Red List classifies species from least concern to critically endangered.</a:t>
             </a:r>
-            <a:endParaRPr lang="en-US" sz="1700" dirty="0"/>
-          </a:p>
-          <a:p>
-            <a:pPr marL="228600" indent="-228600">
+            <a:endParaRPr lang="en-US" sz="1800" dirty="0"/>
+          </a:p>
+          <a:p>
+            <a:pPr marL="304800" indent="-304800">
               <a:spcAft>
-                <a:spcPts val="600"/>
+                <a:spcPts val="800"/>
               </a:spcAft>
               <a:buSzPct val="100000"/>
               <a:buChar char="•"/>
             </a:pPr>
             <a:r>
-              <a:rPr lang="en-US" sz="1700" dirty="0">
+              <a:rPr lang="en-US" sz="1800" dirty="0">
                 <a:solidFill>
                   <a:srgbClr val="141B26"/>
                 </a:solidFill>
               </a:rPr>
               <a:t>Before land is farmed, a plant ecologist may carry out an ecological audit.</a:t>
             </a:r>
-            <a:endParaRPr lang="en-US" sz="1700" dirty="0"/>
+            <a:endParaRPr lang="en-US" sz="1800" dirty="0"/>
           </a:p>
         </p:txBody>
       </p:sp>
@@ -9204,7 +9083,7 @@
         <p:spPr>
           <a:xfrm>
             <a:off x="6583680" y="4821248"/>
-            <a:ext cx="5029200" cy="502920"/>
+            <a:ext cx="5029200" cy="548640"/>
           </a:xfrm>
           <a:prstGeom prst="rect">
             <a:avLst/>
@@ -9220,7 +9099,7 @@
               <a:buNone/>
             </a:pPr>
             <a:r>
-              <a:rPr lang="en-US" sz="1100" dirty="0">
+              <a:rPr lang="en-US" sz="1300" dirty="0">
                 <a:solidFill>
                   <a:srgbClr val="141B26"/>
                 </a:solidFill>
@@ -9230,21 +9109,21 @@
             <a:pPr algn="l" indent="0" marL="0">
               <a:buNone/>
             </a:pPr>
-            <a:endParaRPr lang="en-US" sz="1100" dirty="0"/>
+            <a:endParaRPr lang="en-US" sz="1300" dirty="0"/>
           </a:p>
           <a:p>
             <a:pPr algn="l" indent="0" marL="0">
               <a:buNone/>
             </a:pPr>
             <a:r>
-              <a:rPr lang="en-US" sz="800" dirty="0">
+              <a:rPr lang="en-US" sz="900" dirty="0">
                 <a:solidFill>
                   <a:srgbClr val="5B6574"/>
                 </a:solidFill>
               </a:rPr>
               <a:t>Image: Mathias Appel, CC0, via Wikimedia Commons</a:t>
             </a:r>
-            <a:endParaRPr lang="en-US" sz="1100" dirty="0"/>
+            <a:endParaRPr lang="en-US" sz="1300" dirty="0"/>
           </a:p>
         </p:txBody>
       </p:sp>
@@ -9291,16 +9170,14 @@
           <a:ln/>
         </p:spPr>
         <p:txBody>
-          <a:bodyPr wrap="square" lIns="0" tIns="0" rIns="0" bIns="0" rtlCol="0" anchor="ctr">
-            <a:normAutofit/>
-          </a:bodyPr>
+          <a:bodyPr wrap="square" lIns="0" tIns="0" rIns="0" bIns="0" rtlCol="0" anchor="ctr"/>
           <a:lstStyle/>
           <a:p>
             <a:pPr indent="0" marL="0">
               <a:buNone/>
             </a:pPr>
             <a:r>
-              <a:rPr lang="en-US" sz="1400" b="1" dirty="0">
+              <a:rPr lang="en-US" sz="1700" b="1" dirty="0">
                 <a:solidFill>
                   <a:srgbClr val="7B3A8E"/>
                 </a:solidFill>
@@ -9311,14 +9188,14 @@
               <a:buNone/>
             </a:pPr>
             <a:r>
-              <a:rPr lang="en-US" sz="1400" dirty="0">
+              <a:rPr lang="en-US" sz="1700" dirty="0">
                 <a:solidFill>
                   <a:srgbClr val="141B26"/>
                 </a:solidFill>
               </a:rPr>
               <a:t>Raising the food supply and protecting wild plants both matter; an ecological audit helps decide where farming can expand.</a:t>
             </a:r>
-            <a:endParaRPr lang="en-US" sz="1400" dirty="0"/>
+            <a:endParaRPr lang="en-US" sz="1700" dirty="0"/>
           </a:p>
         </p:txBody>
       </p:sp>
